--- a/~sasano/lecture/proglang/26/proglang8.pptx
+++ b/~sasano/lecture/proglang/26/proglang8.pptx
@@ -163,6 +163,22 @@
       </a:defRPr>
     </a:lvl9pPr>
   </p:defaultTextStyle>
+  <p:extLst>
+    <p:ext uri="{EFAFB233-063F-42B5-8137-9DF3F51BA10A}">
+      <p15:sldGuideLst xmlns:p15="http://schemas.microsoft.com/office/powerpoint/2012/main">
+        <p15:guide id="1" orient="horz" pos="2160">
+          <p15:clr>
+            <a:srgbClr val="A4A3A4"/>
+          </p15:clr>
+        </p15:guide>
+        <p15:guide id="2" pos="2880">
+          <p15:clr>
+            <a:srgbClr val="A4A3A4"/>
+          </p15:clr>
+        </p15:guide>
+      </p15:sldGuideLst>
+    </p:ext>
+  </p:extLst>
 </p:presentation>
 </file>
 
@@ -548,14 +564,14 @@
           </a:ln>
           <a:extLst>
             <a:ext uri="{909E8E84-426E-40dd-AFC4-6F175D3DCCD1}">
-              <a14:hiddenFill xmlns:a14="http://schemas.microsoft.com/office/drawing/2010/main">
+              <a14:hiddenFill xmlns:a14="http://schemas.microsoft.com/office/drawing/2010/main" xmlns="">
                 <a:solidFill>
                   <a:srgbClr val="FFFFFF"/>
                 </a:solidFill>
               </a14:hiddenFill>
             </a:ext>
             <a:ext uri="{FAA26D3D-D897-4be2-8F04-BA451C77F1D7}">
-              <ma14:placeholderFlag xmlns:ma14="http://schemas.microsoft.com/office/mac/drawingml/2011/main" val="1"/>
+              <ma14:placeholderFlag xmlns:ma14="http://schemas.microsoft.com/office/mac/drawingml/2011/main" xmlns="" val="1"/>
             </a:ext>
           </a:extLst>
         </p:spPr>
@@ -596,67 +612,67 @@
           <a:p>
             <a:pPr lvl="0"/>
             <a:r>
-              <a:rPr lang="ja-JP" altLang="en-US" noProof="0" smtClean="0"/>
+              <a:rPr lang="ja-JP" altLang="en-US" noProof="0"/>
               <a:t>マスタ テキストの書式設定</a:t>
             </a:r>
           </a:p>
           <a:p>
             <a:pPr lvl="1"/>
             <a:r>
-              <a:rPr lang="ja-JP" altLang="en-US" noProof="0" smtClean="0"/>
+              <a:rPr lang="ja-JP" altLang="en-US" noProof="0"/>
               <a:t>第 </a:t>
             </a:r>
             <a:r>
-              <a:rPr lang="en-US" altLang="ja-JP" noProof="0" smtClean="0"/>
+              <a:rPr lang="en-US" altLang="ja-JP" noProof="0"/>
               <a:t>2 </a:t>
             </a:r>
             <a:r>
-              <a:rPr lang="ja-JP" altLang="en-US" noProof="0" smtClean="0"/>
+              <a:rPr lang="ja-JP" altLang="en-US" noProof="0"/>
               <a:t>レベル</a:t>
             </a:r>
           </a:p>
           <a:p>
             <a:pPr lvl="2"/>
             <a:r>
-              <a:rPr lang="ja-JP" altLang="en-US" noProof="0" smtClean="0"/>
+              <a:rPr lang="ja-JP" altLang="en-US" noProof="0"/>
               <a:t>第 </a:t>
             </a:r>
             <a:r>
-              <a:rPr lang="en-US" altLang="ja-JP" noProof="0" smtClean="0"/>
+              <a:rPr lang="en-US" altLang="ja-JP" noProof="0"/>
               <a:t>3 </a:t>
             </a:r>
             <a:r>
-              <a:rPr lang="ja-JP" altLang="en-US" noProof="0" smtClean="0"/>
+              <a:rPr lang="ja-JP" altLang="en-US" noProof="0"/>
               <a:t>レベル</a:t>
             </a:r>
           </a:p>
           <a:p>
             <a:pPr lvl="3"/>
             <a:r>
-              <a:rPr lang="ja-JP" altLang="en-US" noProof="0" smtClean="0"/>
+              <a:rPr lang="ja-JP" altLang="en-US" noProof="0"/>
               <a:t>第 </a:t>
             </a:r>
             <a:r>
-              <a:rPr lang="en-US" altLang="ja-JP" noProof="0" smtClean="0"/>
+              <a:rPr lang="en-US" altLang="ja-JP" noProof="0"/>
               <a:t>4 </a:t>
             </a:r>
             <a:r>
-              <a:rPr lang="ja-JP" altLang="en-US" noProof="0" smtClean="0"/>
+              <a:rPr lang="ja-JP" altLang="en-US" noProof="0"/>
               <a:t>レベル</a:t>
             </a:r>
           </a:p>
           <a:p>
             <a:pPr lvl="4"/>
             <a:r>
-              <a:rPr lang="ja-JP" altLang="en-US" noProof="0" smtClean="0"/>
+              <a:rPr lang="ja-JP" altLang="en-US" noProof="0"/>
               <a:t>第 </a:t>
             </a:r>
             <a:r>
-              <a:rPr lang="en-US" altLang="ja-JP" noProof="0" smtClean="0"/>
+              <a:rPr lang="en-US" altLang="ja-JP" noProof="0"/>
               <a:t>5 </a:t>
             </a:r>
             <a:r>
-              <a:rPr lang="ja-JP" altLang="en-US" noProof="0" smtClean="0"/>
+              <a:rPr lang="ja-JP" altLang="en-US" noProof="0"/>
               <a:t>レベル</a:t>
             </a:r>
           </a:p>
@@ -927,14 +943,14 @@
           <a:ln/>
           <a:extLst>
             <a:ext uri="{909E8E84-426E-40dd-AFC4-6F175D3DCCD1}">
-              <a14:hiddenFill xmlns:a14="http://schemas.microsoft.com/office/drawing/2010/main">
+              <a14:hiddenFill xmlns:a14="http://schemas.microsoft.com/office/drawing/2010/main" xmlns="">
                 <a:solidFill>
                   <a:srgbClr val="FFFFFF"/>
                 </a:solidFill>
               </a14:hiddenFill>
             </a:ext>
             <a:ext uri="{91240B29-F687-4f45-9708-019B960494DF}">
-              <a14:hiddenLine xmlns:a14="http://schemas.microsoft.com/office/drawing/2010/main" w="9525">
+              <a14:hiddenLine xmlns:a14="http://schemas.microsoft.com/office/drawing/2010/main" xmlns="" w="9525">
                 <a:solidFill>
                   <a:srgbClr val="000000"/>
                 </a:solidFill>
@@ -1094,14 +1110,14 @@
           <a:ln/>
           <a:extLst>
             <a:ext uri="{909E8E84-426E-40dd-AFC4-6F175D3DCCD1}">
-              <a14:hiddenFill xmlns:a14="http://schemas.microsoft.com/office/drawing/2010/main">
+              <a14:hiddenFill xmlns:a14="http://schemas.microsoft.com/office/drawing/2010/main" xmlns="">
                 <a:solidFill>
                   <a:srgbClr val="FFFFFF"/>
                 </a:solidFill>
               </a14:hiddenFill>
             </a:ext>
             <a:ext uri="{91240B29-F687-4f45-9708-019B960494DF}">
-              <a14:hiddenLine xmlns:a14="http://schemas.microsoft.com/office/drawing/2010/main" w="9525">
+              <a14:hiddenLine xmlns:a14="http://schemas.microsoft.com/office/drawing/2010/main" xmlns="" w="9525">
                 <a:solidFill>
                   <a:srgbClr val="000000"/>
                 </a:solidFill>
@@ -1111,7 +1127,7 @@
               </a14:hiddenLine>
             </a:ext>
             <a:ext uri="{FAA26D3D-D897-4be2-8F04-BA451C77F1D7}">
-              <ma14:placeholderFlag xmlns:ma14="http://schemas.microsoft.com/office/mac/drawingml/2011/main" val="1"/>
+              <ma14:placeholderFlag xmlns:ma14="http://schemas.microsoft.com/office/mac/drawingml/2011/main" xmlns="" val="1"/>
             </a:ext>
           </a:extLst>
         </p:spPr>
@@ -1172,10 +1188,9 @@
           <a:lstStyle/>
           <a:p>
             <a:r>
-              <a:rPr lang="ja-JP" altLang="en-US" smtClean="0"/>
+              <a:rPr lang="ja-JP" altLang="en-US"/>
               <a:t>マスタ タイトルの書式設定</a:t>
             </a:r>
-            <a:endParaRPr lang="ja-JP" altLang="en-US"/>
           </a:p>
         </p:txBody>
       </p:sp>
@@ -1237,10 +1252,9 @@
           </a:lstStyle>
           <a:p>
             <a:r>
-              <a:rPr lang="ja-JP" altLang="en-US" smtClean="0"/>
+              <a:rPr lang="ja-JP" altLang="en-US"/>
               <a:t>マスタ サブタイトルの書式設定</a:t>
             </a:r>
-            <a:endParaRPr lang="ja-JP" altLang="en-US"/>
           </a:p>
         </p:txBody>
       </p:sp>
@@ -1381,10 +1395,9 @@
           <a:lstStyle/>
           <a:p>
             <a:r>
-              <a:rPr lang="ja-JP" altLang="en-US" smtClean="0"/>
+              <a:rPr lang="ja-JP" altLang="en-US"/>
               <a:t>マスタ タイトルの書式設定</a:t>
             </a:r>
-            <a:endParaRPr lang="ja-JP" altLang="en-US"/>
           </a:p>
         </p:txBody>
       </p:sp>
@@ -1405,70 +1418,69 @@
           <a:p>
             <a:pPr lvl="0"/>
             <a:r>
-              <a:rPr lang="ja-JP" altLang="en-US" smtClean="0"/>
+              <a:rPr lang="ja-JP" altLang="en-US"/>
               <a:t>マスタ テキストの書式設定</a:t>
             </a:r>
           </a:p>
           <a:p>
             <a:pPr lvl="1"/>
             <a:r>
-              <a:rPr lang="ja-JP" altLang="en-US" smtClean="0"/>
+              <a:rPr lang="ja-JP" altLang="en-US"/>
               <a:t>第 </a:t>
             </a:r>
             <a:r>
-              <a:rPr lang="en-US" altLang="ja-JP" smtClean="0"/>
+              <a:rPr lang="en-US" altLang="ja-JP"/>
               <a:t>2 </a:t>
             </a:r>
             <a:r>
-              <a:rPr lang="ja-JP" altLang="en-US" smtClean="0"/>
+              <a:rPr lang="ja-JP" altLang="en-US"/>
               <a:t>レベル</a:t>
             </a:r>
           </a:p>
           <a:p>
             <a:pPr lvl="2"/>
             <a:r>
-              <a:rPr lang="ja-JP" altLang="en-US" smtClean="0"/>
+              <a:rPr lang="ja-JP" altLang="en-US"/>
               <a:t>第 </a:t>
             </a:r>
             <a:r>
-              <a:rPr lang="en-US" altLang="ja-JP" smtClean="0"/>
+              <a:rPr lang="en-US" altLang="ja-JP"/>
               <a:t>3 </a:t>
             </a:r>
             <a:r>
-              <a:rPr lang="ja-JP" altLang="en-US" smtClean="0"/>
+              <a:rPr lang="ja-JP" altLang="en-US"/>
               <a:t>レベル</a:t>
             </a:r>
           </a:p>
           <a:p>
             <a:pPr lvl="3"/>
             <a:r>
-              <a:rPr lang="ja-JP" altLang="en-US" smtClean="0"/>
+              <a:rPr lang="ja-JP" altLang="en-US"/>
               <a:t>第 </a:t>
             </a:r>
             <a:r>
-              <a:rPr lang="en-US" altLang="ja-JP" smtClean="0"/>
+              <a:rPr lang="en-US" altLang="ja-JP"/>
               <a:t>4 </a:t>
             </a:r>
             <a:r>
-              <a:rPr lang="ja-JP" altLang="en-US" smtClean="0"/>
+              <a:rPr lang="ja-JP" altLang="en-US"/>
               <a:t>レベル</a:t>
             </a:r>
           </a:p>
           <a:p>
             <a:pPr lvl="4"/>
             <a:r>
-              <a:rPr lang="ja-JP" altLang="en-US" smtClean="0"/>
+              <a:rPr lang="ja-JP" altLang="en-US"/>
               <a:t>第 </a:t>
             </a:r>
             <a:r>
-              <a:rPr lang="en-US" altLang="ja-JP" smtClean="0"/>
+              <a:rPr lang="en-US" altLang="ja-JP"/>
               <a:t>5 </a:t>
             </a:r>
             <a:r>
-              <a:rPr lang="ja-JP" altLang="en-US" smtClean="0"/>
+              <a:rPr lang="ja-JP" altLang="en-US"/>
               <a:t>レベル</a:t>
             </a:r>
-            <a:endParaRPr lang="ja-JP" altLang="en-US"/>
           </a:p>
         </p:txBody>
       </p:sp>
@@ -1614,10 +1626,9 @@
           <a:lstStyle/>
           <a:p>
             <a:r>
-              <a:rPr lang="ja-JP" altLang="en-US" smtClean="0"/>
+              <a:rPr lang="ja-JP" altLang="en-US"/>
               <a:t>マスタ タイトルの書式設定</a:t>
             </a:r>
-            <a:endParaRPr lang="ja-JP" altLang="en-US"/>
           </a:p>
         </p:txBody>
       </p:sp>
@@ -1643,70 +1654,69 @@
           <a:p>
             <a:pPr lvl="0"/>
             <a:r>
-              <a:rPr lang="ja-JP" altLang="en-US" smtClean="0"/>
+              <a:rPr lang="ja-JP" altLang="en-US"/>
               <a:t>マスタ テキストの書式設定</a:t>
             </a:r>
           </a:p>
           <a:p>
             <a:pPr lvl="1"/>
             <a:r>
-              <a:rPr lang="ja-JP" altLang="en-US" smtClean="0"/>
+              <a:rPr lang="ja-JP" altLang="en-US"/>
               <a:t>第 </a:t>
             </a:r>
             <a:r>
-              <a:rPr lang="en-US" altLang="ja-JP" smtClean="0"/>
+              <a:rPr lang="en-US" altLang="ja-JP"/>
               <a:t>2 </a:t>
             </a:r>
             <a:r>
-              <a:rPr lang="ja-JP" altLang="en-US" smtClean="0"/>
+              <a:rPr lang="ja-JP" altLang="en-US"/>
               <a:t>レベル</a:t>
             </a:r>
           </a:p>
           <a:p>
             <a:pPr lvl="2"/>
             <a:r>
-              <a:rPr lang="ja-JP" altLang="en-US" smtClean="0"/>
+              <a:rPr lang="ja-JP" altLang="en-US"/>
               <a:t>第 </a:t>
             </a:r>
             <a:r>
-              <a:rPr lang="en-US" altLang="ja-JP" smtClean="0"/>
+              <a:rPr lang="en-US" altLang="ja-JP"/>
               <a:t>3 </a:t>
             </a:r>
             <a:r>
-              <a:rPr lang="ja-JP" altLang="en-US" smtClean="0"/>
+              <a:rPr lang="ja-JP" altLang="en-US"/>
               <a:t>レベル</a:t>
             </a:r>
           </a:p>
           <a:p>
             <a:pPr lvl="3"/>
             <a:r>
-              <a:rPr lang="ja-JP" altLang="en-US" smtClean="0"/>
+              <a:rPr lang="ja-JP" altLang="en-US"/>
               <a:t>第 </a:t>
             </a:r>
             <a:r>
-              <a:rPr lang="en-US" altLang="ja-JP" smtClean="0"/>
+              <a:rPr lang="en-US" altLang="ja-JP"/>
               <a:t>4 </a:t>
             </a:r>
             <a:r>
-              <a:rPr lang="ja-JP" altLang="en-US" smtClean="0"/>
+              <a:rPr lang="ja-JP" altLang="en-US"/>
               <a:t>レベル</a:t>
             </a:r>
           </a:p>
           <a:p>
             <a:pPr lvl="4"/>
             <a:r>
-              <a:rPr lang="ja-JP" altLang="en-US" smtClean="0"/>
+              <a:rPr lang="ja-JP" altLang="en-US"/>
               <a:t>第 </a:t>
             </a:r>
             <a:r>
-              <a:rPr lang="en-US" altLang="ja-JP" smtClean="0"/>
+              <a:rPr lang="en-US" altLang="ja-JP"/>
               <a:t>5 </a:t>
             </a:r>
             <a:r>
-              <a:rPr lang="ja-JP" altLang="en-US" smtClean="0"/>
+              <a:rPr lang="ja-JP" altLang="en-US"/>
               <a:t>レベル</a:t>
             </a:r>
-            <a:endParaRPr lang="ja-JP" altLang="en-US"/>
           </a:p>
         </p:txBody>
       </p:sp>
@@ -1847,10 +1857,9 @@
           <a:lstStyle/>
           <a:p>
             <a:r>
-              <a:rPr lang="ja-JP" altLang="en-US" smtClean="0"/>
+              <a:rPr lang="ja-JP" altLang="en-US"/>
               <a:t>マスタ タイトルの書式設定</a:t>
             </a:r>
-            <a:endParaRPr lang="ja-JP" altLang="en-US"/>
           </a:p>
         </p:txBody>
       </p:sp>
@@ -1871,70 +1880,69 @@
           <a:p>
             <a:pPr lvl="0"/>
             <a:r>
-              <a:rPr lang="ja-JP" altLang="en-US" smtClean="0"/>
+              <a:rPr lang="ja-JP" altLang="en-US"/>
               <a:t>マスタ テキストの書式設定</a:t>
             </a:r>
           </a:p>
           <a:p>
             <a:pPr lvl="1"/>
             <a:r>
-              <a:rPr lang="ja-JP" altLang="en-US" smtClean="0"/>
+              <a:rPr lang="ja-JP" altLang="en-US"/>
               <a:t>第 </a:t>
             </a:r>
             <a:r>
-              <a:rPr lang="en-US" altLang="ja-JP" smtClean="0"/>
+              <a:rPr lang="en-US" altLang="ja-JP"/>
               <a:t>2 </a:t>
             </a:r>
             <a:r>
-              <a:rPr lang="ja-JP" altLang="en-US" smtClean="0"/>
+              <a:rPr lang="ja-JP" altLang="en-US"/>
               <a:t>レベル</a:t>
             </a:r>
           </a:p>
           <a:p>
             <a:pPr lvl="2"/>
             <a:r>
-              <a:rPr lang="ja-JP" altLang="en-US" smtClean="0"/>
+              <a:rPr lang="ja-JP" altLang="en-US"/>
               <a:t>第 </a:t>
             </a:r>
             <a:r>
-              <a:rPr lang="en-US" altLang="ja-JP" smtClean="0"/>
+              <a:rPr lang="en-US" altLang="ja-JP"/>
               <a:t>3 </a:t>
             </a:r>
             <a:r>
-              <a:rPr lang="ja-JP" altLang="en-US" smtClean="0"/>
+              <a:rPr lang="ja-JP" altLang="en-US"/>
               <a:t>レベル</a:t>
             </a:r>
           </a:p>
           <a:p>
             <a:pPr lvl="3"/>
             <a:r>
-              <a:rPr lang="ja-JP" altLang="en-US" smtClean="0"/>
+              <a:rPr lang="ja-JP" altLang="en-US"/>
               <a:t>第 </a:t>
             </a:r>
             <a:r>
-              <a:rPr lang="en-US" altLang="ja-JP" smtClean="0"/>
+              <a:rPr lang="en-US" altLang="ja-JP"/>
               <a:t>4 </a:t>
             </a:r>
             <a:r>
-              <a:rPr lang="ja-JP" altLang="en-US" smtClean="0"/>
+              <a:rPr lang="ja-JP" altLang="en-US"/>
               <a:t>レベル</a:t>
             </a:r>
           </a:p>
           <a:p>
             <a:pPr lvl="4"/>
             <a:r>
-              <a:rPr lang="ja-JP" altLang="en-US" smtClean="0"/>
+              <a:rPr lang="ja-JP" altLang="en-US"/>
               <a:t>第 </a:t>
             </a:r>
             <a:r>
-              <a:rPr lang="en-US" altLang="ja-JP" smtClean="0"/>
+              <a:rPr lang="en-US" altLang="ja-JP"/>
               <a:t>5 </a:t>
             </a:r>
             <a:r>
-              <a:rPr lang="ja-JP" altLang="en-US" smtClean="0"/>
+              <a:rPr lang="ja-JP" altLang="en-US"/>
               <a:t>レベル</a:t>
             </a:r>
-            <a:endParaRPr lang="ja-JP" altLang="en-US"/>
           </a:p>
         </p:txBody>
       </p:sp>
@@ -2084,10 +2092,9 @@
           </a:lstStyle>
           <a:p>
             <a:r>
-              <a:rPr lang="ja-JP" altLang="en-US" smtClean="0"/>
+              <a:rPr lang="ja-JP" altLang="en-US"/>
               <a:t>マスタ タイトルの書式設定</a:t>
             </a:r>
-            <a:endParaRPr lang="ja-JP" altLang="en-US"/>
           </a:p>
         </p:txBody>
       </p:sp>
@@ -2150,7 +2157,7 @@
           <a:p>
             <a:pPr lvl="0"/>
             <a:r>
-              <a:rPr lang="ja-JP" altLang="en-US" smtClean="0"/>
+              <a:rPr lang="ja-JP" altLang="en-US"/>
               <a:t>マスタ テキストの書式設定</a:t>
             </a:r>
           </a:p>
@@ -2293,10 +2300,9 @@
           <a:lstStyle/>
           <a:p>
             <a:r>
-              <a:rPr lang="ja-JP" altLang="en-US" smtClean="0"/>
+              <a:rPr lang="ja-JP" altLang="en-US"/>
               <a:t>マスタ タイトルの書式設定</a:t>
             </a:r>
-            <a:endParaRPr lang="ja-JP" altLang="en-US"/>
           </a:p>
         </p:txBody>
       </p:sp>
@@ -2350,70 +2356,69 @@
           <a:p>
             <a:pPr lvl="0"/>
             <a:r>
-              <a:rPr lang="ja-JP" altLang="en-US" smtClean="0"/>
+              <a:rPr lang="ja-JP" altLang="en-US"/>
               <a:t>マスタ テキストの書式設定</a:t>
             </a:r>
           </a:p>
           <a:p>
             <a:pPr lvl="1"/>
             <a:r>
-              <a:rPr lang="ja-JP" altLang="en-US" smtClean="0"/>
+              <a:rPr lang="ja-JP" altLang="en-US"/>
               <a:t>第 </a:t>
             </a:r>
             <a:r>
-              <a:rPr lang="en-US" altLang="ja-JP" smtClean="0"/>
+              <a:rPr lang="en-US" altLang="ja-JP"/>
               <a:t>2 </a:t>
             </a:r>
             <a:r>
-              <a:rPr lang="ja-JP" altLang="en-US" smtClean="0"/>
+              <a:rPr lang="ja-JP" altLang="en-US"/>
               <a:t>レベル</a:t>
             </a:r>
           </a:p>
           <a:p>
             <a:pPr lvl="2"/>
             <a:r>
-              <a:rPr lang="ja-JP" altLang="en-US" smtClean="0"/>
+              <a:rPr lang="ja-JP" altLang="en-US"/>
               <a:t>第 </a:t>
             </a:r>
             <a:r>
-              <a:rPr lang="en-US" altLang="ja-JP" smtClean="0"/>
+              <a:rPr lang="en-US" altLang="ja-JP"/>
               <a:t>3 </a:t>
             </a:r>
             <a:r>
-              <a:rPr lang="ja-JP" altLang="en-US" smtClean="0"/>
+              <a:rPr lang="ja-JP" altLang="en-US"/>
               <a:t>レベル</a:t>
             </a:r>
           </a:p>
           <a:p>
             <a:pPr lvl="3"/>
             <a:r>
-              <a:rPr lang="ja-JP" altLang="en-US" smtClean="0"/>
+              <a:rPr lang="ja-JP" altLang="en-US"/>
               <a:t>第 </a:t>
             </a:r>
             <a:r>
-              <a:rPr lang="en-US" altLang="ja-JP" smtClean="0"/>
+              <a:rPr lang="en-US" altLang="ja-JP"/>
               <a:t>4 </a:t>
             </a:r>
             <a:r>
-              <a:rPr lang="ja-JP" altLang="en-US" smtClean="0"/>
+              <a:rPr lang="ja-JP" altLang="en-US"/>
               <a:t>レベル</a:t>
             </a:r>
           </a:p>
           <a:p>
             <a:pPr lvl="4"/>
             <a:r>
-              <a:rPr lang="ja-JP" altLang="en-US" smtClean="0"/>
+              <a:rPr lang="ja-JP" altLang="en-US"/>
               <a:t>第 </a:t>
             </a:r>
             <a:r>
-              <a:rPr lang="en-US" altLang="ja-JP" smtClean="0"/>
+              <a:rPr lang="en-US" altLang="ja-JP"/>
               <a:t>5 </a:t>
             </a:r>
             <a:r>
-              <a:rPr lang="ja-JP" altLang="en-US" smtClean="0"/>
+              <a:rPr lang="ja-JP" altLang="en-US"/>
               <a:t>レベル</a:t>
             </a:r>
-            <a:endParaRPr lang="ja-JP" altLang="en-US"/>
           </a:p>
         </p:txBody>
       </p:sp>
@@ -2467,70 +2472,69 @@
           <a:p>
             <a:pPr lvl="0"/>
             <a:r>
-              <a:rPr lang="ja-JP" altLang="en-US" smtClean="0"/>
+              <a:rPr lang="ja-JP" altLang="en-US"/>
               <a:t>マスタ テキストの書式設定</a:t>
             </a:r>
           </a:p>
           <a:p>
             <a:pPr lvl="1"/>
             <a:r>
-              <a:rPr lang="ja-JP" altLang="en-US" smtClean="0"/>
+              <a:rPr lang="ja-JP" altLang="en-US"/>
               <a:t>第 </a:t>
             </a:r>
             <a:r>
-              <a:rPr lang="en-US" altLang="ja-JP" smtClean="0"/>
+              <a:rPr lang="en-US" altLang="ja-JP"/>
               <a:t>2 </a:t>
             </a:r>
             <a:r>
-              <a:rPr lang="ja-JP" altLang="en-US" smtClean="0"/>
+              <a:rPr lang="ja-JP" altLang="en-US"/>
               <a:t>レベル</a:t>
             </a:r>
           </a:p>
           <a:p>
             <a:pPr lvl="2"/>
             <a:r>
-              <a:rPr lang="ja-JP" altLang="en-US" smtClean="0"/>
+              <a:rPr lang="ja-JP" altLang="en-US"/>
               <a:t>第 </a:t>
             </a:r>
             <a:r>
-              <a:rPr lang="en-US" altLang="ja-JP" smtClean="0"/>
+              <a:rPr lang="en-US" altLang="ja-JP"/>
               <a:t>3 </a:t>
             </a:r>
             <a:r>
-              <a:rPr lang="ja-JP" altLang="en-US" smtClean="0"/>
+              <a:rPr lang="ja-JP" altLang="en-US"/>
               <a:t>レベル</a:t>
             </a:r>
           </a:p>
           <a:p>
             <a:pPr lvl="3"/>
             <a:r>
-              <a:rPr lang="ja-JP" altLang="en-US" smtClean="0"/>
+              <a:rPr lang="ja-JP" altLang="en-US"/>
               <a:t>第 </a:t>
             </a:r>
             <a:r>
-              <a:rPr lang="en-US" altLang="ja-JP" smtClean="0"/>
+              <a:rPr lang="en-US" altLang="ja-JP"/>
               <a:t>4 </a:t>
             </a:r>
             <a:r>
-              <a:rPr lang="ja-JP" altLang="en-US" smtClean="0"/>
+              <a:rPr lang="ja-JP" altLang="en-US"/>
               <a:t>レベル</a:t>
             </a:r>
           </a:p>
           <a:p>
             <a:pPr lvl="4"/>
             <a:r>
-              <a:rPr lang="ja-JP" altLang="en-US" smtClean="0"/>
+              <a:rPr lang="ja-JP" altLang="en-US"/>
               <a:t>第 </a:t>
             </a:r>
             <a:r>
-              <a:rPr lang="en-US" altLang="ja-JP" smtClean="0"/>
+              <a:rPr lang="en-US" altLang="ja-JP"/>
               <a:t>5 </a:t>
             </a:r>
             <a:r>
-              <a:rPr lang="ja-JP" altLang="en-US" smtClean="0"/>
+              <a:rPr lang="ja-JP" altLang="en-US"/>
               <a:t>レベル</a:t>
             </a:r>
-            <a:endParaRPr lang="ja-JP" altLang="en-US"/>
           </a:p>
         </p:txBody>
       </p:sp>
@@ -2680,10 +2684,9 @@
           </a:lstStyle>
           <a:p>
             <a:r>
-              <a:rPr lang="ja-JP" altLang="en-US" smtClean="0"/>
+              <a:rPr lang="ja-JP" altLang="en-US"/>
               <a:t>マスタ タイトルの書式設定</a:t>
             </a:r>
-            <a:endParaRPr lang="ja-JP" altLang="en-US"/>
           </a:p>
         </p:txBody>
       </p:sp>
@@ -2746,7 +2749,7 @@
           <a:p>
             <a:pPr lvl="0"/>
             <a:r>
-              <a:rPr lang="ja-JP" altLang="en-US" smtClean="0"/>
+              <a:rPr lang="ja-JP" altLang="en-US"/>
               <a:t>マスタ テキストの書式設定</a:t>
             </a:r>
           </a:p>
@@ -2802,70 +2805,69 @@
           <a:p>
             <a:pPr lvl="0"/>
             <a:r>
-              <a:rPr lang="ja-JP" altLang="en-US" smtClean="0"/>
+              <a:rPr lang="ja-JP" altLang="en-US"/>
               <a:t>マスタ テキストの書式設定</a:t>
             </a:r>
           </a:p>
           <a:p>
             <a:pPr lvl="1"/>
             <a:r>
-              <a:rPr lang="ja-JP" altLang="en-US" smtClean="0"/>
+              <a:rPr lang="ja-JP" altLang="en-US"/>
               <a:t>第 </a:t>
             </a:r>
             <a:r>
-              <a:rPr lang="en-US" altLang="ja-JP" smtClean="0"/>
+              <a:rPr lang="en-US" altLang="ja-JP"/>
               <a:t>2 </a:t>
             </a:r>
             <a:r>
-              <a:rPr lang="ja-JP" altLang="en-US" smtClean="0"/>
+              <a:rPr lang="ja-JP" altLang="en-US"/>
               <a:t>レベル</a:t>
             </a:r>
           </a:p>
           <a:p>
             <a:pPr lvl="2"/>
             <a:r>
-              <a:rPr lang="ja-JP" altLang="en-US" smtClean="0"/>
+              <a:rPr lang="ja-JP" altLang="en-US"/>
               <a:t>第 </a:t>
             </a:r>
             <a:r>
-              <a:rPr lang="en-US" altLang="ja-JP" smtClean="0"/>
+              <a:rPr lang="en-US" altLang="ja-JP"/>
               <a:t>3 </a:t>
             </a:r>
             <a:r>
-              <a:rPr lang="ja-JP" altLang="en-US" smtClean="0"/>
+              <a:rPr lang="ja-JP" altLang="en-US"/>
               <a:t>レベル</a:t>
             </a:r>
           </a:p>
           <a:p>
             <a:pPr lvl="3"/>
             <a:r>
-              <a:rPr lang="ja-JP" altLang="en-US" smtClean="0"/>
+              <a:rPr lang="ja-JP" altLang="en-US"/>
               <a:t>第 </a:t>
             </a:r>
             <a:r>
-              <a:rPr lang="en-US" altLang="ja-JP" smtClean="0"/>
+              <a:rPr lang="en-US" altLang="ja-JP"/>
               <a:t>4 </a:t>
             </a:r>
             <a:r>
-              <a:rPr lang="ja-JP" altLang="en-US" smtClean="0"/>
+              <a:rPr lang="ja-JP" altLang="en-US"/>
               <a:t>レベル</a:t>
             </a:r>
           </a:p>
           <a:p>
             <a:pPr lvl="4"/>
             <a:r>
-              <a:rPr lang="ja-JP" altLang="en-US" smtClean="0"/>
+              <a:rPr lang="ja-JP" altLang="en-US"/>
               <a:t>第 </a:t>
             </a:r>
             <a:r>
-              <a:rPr lang="en-US" altLang="ja-JP" smtClean="0"/>
+              <a:rPr lang="en-US" altLang="ja-JP"/>
               <a:t>5 </a:t>
             </a:r>
             <a:r>
-              <a:rPr lang="ja-JP" altLang="en-US" smtClean="0"/>
+              <a:rPr lang="ja-JP" altLang="en-US"/>
               <a:t>レベル</a:t>
             </a:r>
-            <a:endParaRPr lang="ja-JP" altLang="en-US"/>
           </a:p>
         </p:txBody>
       </p:sp>
@@ -2928,7 +2930,7 @@
           <a:p>
             <a:pPr lvl="0"/>
             <a:r>
-              <a:rPr lang="ja-JP" altLang="en-US" smtClean="0"/>
+              <a:rPr lang="ja-JP" altLang="en-US"/>
               <a:t>マスタ テキストの書式設定</a:t>
             </a:r>
           </a:p>
@@ -2984,70 +2986,69 @@
           <a:p>
             <a:pPr lvl="0"/>
             <a:r>
-              <a:rPr lang="ja-JP" altLang="en-US" smtClean="0"/>
+              <a:rPr lang="ja-JP" altLang="en-US"/>
               <a:t>マスタ テキストの書式設定</a:t>
             </a:r>
           </a:p>
           <a:p>
             <a:pPr lvl="1"/>
             <a:r>
-              <a:rPr lang="ja-JP" altLang="en-US" smtClean="0"/>
+              <a:rPr lang="ja-JP" altLang="en-US"/>
               <a:t>第 </a:t>
             </a:r>
             <a:r>
-              <a:rPr lang="en-US" altLang="ja-JP" smtClean="0"/>
+              <a:rPr lang="en-US" altLang="ja-JP"/>
               <a:t>2 </a:t>
             </a:r>
             <a:r>
-              <a:rPr lang="ja-JP" altLang="en-US" smtClean="0"/>
+              <a:rPr lang="ja-JP" altLang="en-US"/>
               <a:t>レベル</a:t>
             </a:r>
           </a:p>
           <a:p>
             <a:pPr lvl="2"/>
             <a:r>
-              <a:rPr lang="ja-JP" altLang="en-US" smtClean="0"/>
+              <a:rPr lang="ja-JP" altLang="en-US"/>
               <a:t>第 </a:t>
             </a:r>
             <a:r>
-              <a:rPr lang="en-US" altLang="ja-JP" smtClean="0"/>
+              <a:rPr lang="en-US" altLang="ja-JP"/>
               <a:t>3 </a:t>
             </a:r>
             <a:r>
-              <a:rPr lang="ja-JP" altLang="en-US" smtClean="0"/>
+              <a:rPr lang="ja-JP" altLang="en-US"/>
               <a:t>レベル</a:t>
             </a:r>
           </a:p>
           <a:p>
             <a:pPr lvl="3"/>
             <a:r>
-              <a:rPr lang="ja-JP" altLang="en-US" smtClean="0"/>
+              <a:rPr lang="ja-JP" altLang="en-US"/>
               <a:t>第 </a:t>
             </a:r>
             <a:r>
-              <a:rPr lang="en-US" altLang="ja-JP" smtClean="0"/>
+              <a:rPr lang="en-US" altLang="ja-JP"/>
               <a:t>4 </a:t>
             </a:r>
             <a:r>
-              <a:rPr lang="ja-JP" altLang="en-US" smtClean="0"/>
+              <a:rPr lang="ja-JP" altLang="en-US"/>
               <a:t>レベル</a:t>
             </a:r>
           </a:p>
           <a:p>
             <a:pPr lvl="4"/>
             <a:r>
-              <a:rPr lang="ja-JP" altLang="en-US" smtClean="0"/>
+              <a:rPr lang="ja-JP" altLang="en-US"/>
               <a:t>第 </a:t>
             </a:r>
             <a:r>
-              <a:rPr lang="en-US" altLang="ja-JP" smtClean="0"/>
+              <a:rPr lang="en-US" altLang="ja-JP"/>
               <a:t>5 </a:t>
             </a:r>
             <a:r>
-              <a:rPr lang="ja-JP" altLang="en-US" smtClean="0"/>
+              <a:rPr lang="ja-JP" altLang="en-US"/>
               <a:t>レベル</a:t>
             </a:r>
-            <a:endParaRPr lang="ja-JP" altLang="en-US"/>
           </a:p>
         </p:txBody>
       </p:sp>
@@ -3188,10 +3189,9 @@
           <a:lstStyle/>
           <a:p>
             <a:r>
-              <a:rPr lang="ja-JP" altLang="en-US" smtClean="0"/>
+              <a:rPr lang="ja-JP" altLang="en-US"/>
               <a:t>マスタ タイトルの書式設定</a:t>
             </a:r>
-            <a:endParaRPr lang="ja-JP" altLang="en-US"/>
           </a:p>
         </p:txBody>
       </p:sp>
@@ -3462,10 +3462,9 @@
           </a:lstStyle>
           <a:p>
             <a:r>
-              <a:rPr lang="ja-JP" altLang="en-US" smtClean="0"/>
+              <a:rPr lang="ja-JP" altLang="en-US"/>
               <a:t>マスタ タイトルの書式設定</a:t>
             </a:r>
-            <a:endParaRPr lang="ja-JP" altLang="en-US"/>
           </a:p>
         </p:txBody>
       </p:sp>
@@ -3519,70 +3518,69 @@
           <a:p>
             <a:pPr lvl="0"/>
             <a:r>
-              <a:rPr lang="ja-JP" altLang="en-US" smtClean="0"/>
+              <a:rPr lang="ja-JP" altLang="en-US"/>
               <a:t>マスタ テキストの書式設定</a:t>
             </a:r>
           </a:p>
           <a:p>
             <a:pPr lvl="1"/>
             <a:r>
-              <a:rPr lang="ja-JP" altLang="en-US" smtClean="0"/>
+              <a:rPr lang="ja-JP" altLang="en-US"/>
               <a:t>第 </a:t>
             </a:r>
             <a:r>
-              <a:rPr lang="en-US" altLang="ja-JP" smtClean="0"/>
+              <a:rPr lang="en-US" altLang="ja-JP"/>
               <a:t>2 </a:t>
             </a:r>
             <a:r>
-              <a:rPr lang="ja-JP" altLang="en-US" smtClean="0"/>
+              <a:rPr lang="ja-JP" altLang="en-US"/>
               <a:t>レベル</a:t>
             </a:r>
           </a:p>
           <a:p>
             <a:pPr lvl="2"/>
             <a:r>
-              <a:rPr lang="ja-JP" altLang="en-US" smtClean="0"/>
+              <a:rPr lang="ja-JP" altLang="en-US"/>
               <a:t>第 </a:t>
             </a:r>
             <a:r>
-              <a:rPr lang="en-US" altLang="ja-JP" smtClean="0"/>
+              <a:rPr lang="en-US" altLang="ja-JP"/>
               <a:t>3 </a:t>
             </a:r>
             <a:r>
-              <a:rPr lang="ja-JP" altLang="en-US" smtClean="0"/>
+              <a:rPr lang="ja-JP" altLang="en-US"/>
               <a:t>レベル</a:t>
             </a:r>
           </a:p>
           <a:p>
             <a:pPr lvl="3"/>
             <a:r>
-              <a:rPr lang="ja-JP" altLang="en-US" smtClean="0"/>
+              <a:rPr lang="ja-JP" altLang="en-US"/>
               <a:t>第 </a:t>
             </a:r>
             <a:r>
-              <a:rPr lang="en-US" altLang="ja-JP" smtClean="0"/>
+              <a:rPr lang="en-US" altLang="ja-JP"/>
               <a:t>4 </a:t>
             </a:r>
             <a:r>
-              <a:rPr lang="ja-JP" altLang="en-US" smtClean="0"/>
+              <a:rPr lang="ja-JP" altLang="en-US"/>
               <a:t>レベル</a:t>
             </a:r>
           </a:p>
           <a:p>
             <a:pPr lvl="4"/>
             <a:r>
-              <a:rPr lang="ja-JP" altLang="en-US" smtClean="0"/>
+              <a:rPr lang="ja-JP" altLang="en-US"/>
               <a:t>第 </a:t>
             </a:r>
             <a:r>
-              <a:rPr lang="en-US" altLang="ja-JP" smtClean="0"/>
+              <a:rPr lang="en-US" altLang="ja-JP"/>
               <a:t>5 </a:t>
             </a:r>
             <a:r>
-              <a:rPr lang="ja-JP" altLang="en-US" smtClean="0"/>
+              <a:rPr lang="ja-JP" altLang="en-US"/>
               <a:t>レベル</a:t>
             </a:r>
-            <a:endParaRPr lang="ja-JP" altLang="en-US"/>
           </a:p>
         </p:txBody>
       </p:sp>
@@ -3645,7 +3643,7 @@
           <a:p>
             <a:pPr lvl="0"/>
             <a:r>
-              <a:rPr lang="ja-JP" altLang="en-US" smtClean="0"/>
+              <a:rPr lang="ja-JP" altLang="en-US"/>
               <a:t>マスタ テキストの書式設定</a:t>
             </a:r>
           </a:p>
@@ -3797,10 +3795,9 @@
           </a:lstStyle>
           <a:p>
             <a:r>
-              <a:rPr lang="ja-JP" altLang="en-US" smtClean="0"/>
+              <a:rPr lang="ja-JP" altLang="en-US"/>
               <a:t>マスタ タイトルの書式設定</a:t>
             </a:r>
-            <a:endParaRPr lang="ja-JP" altLang="en-US"/>
           </a:p>
         </p:txBody>
       </p:sp>
@@ -3862,7 +3859,7 @@
           </a:lstStyle>
           <a:p>
             <a:pPr lvl="0"/>
-            <a:endParaRPr lang="ja-JP" altLang="en-US" noProof="0" smtClean="0"/>
+            <a:endParaRPr lang="ja-JP" altLang="en-US" noProof="0"/>
           </a:p>
         </p:txBody>
       </p:sp>
@@ -3925,7 +3922,7 @@
           <a:p>
             <a:pPr lvl="0"/>
             <a:r>
-              <a:rPr lang="ja-JP" altLang="en-US" smtClean="0"/>
+              <a:rPr lang="ja-JP" altLang="en-US"/>
               <a:t>マスタ テキストの書式設定</a:t>
             </a:r>
           </a:p>
@@ -4084,14 +4081,14 @@
           </a:ln>
           <a:extLst>
             <a:ext uri="{909E8E84-426E-40dd-AFC4-6F175D3DCCD1}">
-              <a14:hiddenFill xmlns:a14="http://schemas.microsoft.com/office/drawing/2010/main">
+              <a14:hiddenFill xmlns:a14="http://schemas.microsoft.com/office/drawing/2010/main" xmlns="">
                 <a:solidFill>
                   <a:srgbClr val="FFFFFF"/>
                 </a:solidFill>
               </a14:hiddenFill>
             </a:ext>
             <a:ext uri="{91240B29-F687-4f45-9708-019B960494DF}">
-              <a14:hiddenLine xmlns:a14="http://schemas.microsoft.com/office/drawing/2010/main" w="9525">
+              <a14:hiddenLine xmlns:a14="http://schemas.microsoft.com/office/drawing/2010/main" xmlns="" w="9525">
                 <a:solidFill>
                   <a:srgbClr val="000000"/>
                 </a:solidFill>
@@ -4101,7 +4098,7 @@
               </a14:hiddenLine>
             </a:ext>
             <a:ext uri="{FAA26D3D-D897-4be2-8F04-BA451C77F1D7}">
-              <ma14:placeholderFlag xmlns:ma14="http://schemas.microsoft.com/office/mac/drawingml/2011/main" val="1"/>
+              <ma14:placeholderFlag xmlns:ma14="http://schemas.microsoft.com/office/mac/drawingml/2011/main" xmlns="" val="1"/>
             </a:ext>
           </a:extLst>
         </p:spPr>
@@ -4145,14 +4142,14 @@
           </a:ln>
           <a:extLst>
             <a:ext uri="{909E8E84-426E-40dd-AFC4-6F175D3DCCD1}">
-              <a14:hiddenFill xmlns:a14="http://schemas.microsoft.com/office/drawing/2010/main">
+              <a14:hiddenFill xmlns:a14="http://schemas.microsoft.com/office/drawing/2010/main" xmlns="">
                 <a:solidFill>
                   <a:srgbClr val="FFFFFF"/>
                 </a:solidFill>
               </a14:hiddenFill>
             </a:ext>
             <a:ext uri="{91240B29-F687-4f45-9708-019B960494DF}">
-              <a14:hiddenLine xmlns:a14="http://schemas.microsoft.com/office/drawing/2010/main" w="9525">
+              <a14:hiddenLine xmlns:a14="http://schemas.microsoft.com/office/drawing/2010/main" xmlns="" w="9525">
                 <a:solidFill>
                   <a:srgbClr val="000000"/>
                 </a:solidFill>
@@ -4162,7 +4159,7 @@
               </a14:hiddenLine>
             </a:ext>
             <a:ext uri="{FAA26D3D-D897-4be2-8F04-BA451C77F1D7}">
-              <ma14:placeholderFlag xmlns:ma14="http://schemas.microsoft.com/office/mac/drawingml/2011/main" val="1"/>
+              <ma14:placeholderFlag xmlns:ma14="http://schemas.microsoft.com/office/mac/drawingml/2011/main" xmlns="" val="1"/>
             </a:ext>
           </a:extLst>
         </p:spPr>
@@ -4859,7 +4856,7 @@
         </p:nvSpPr>
         <p:spPr>
           <a:xfrm>
-            <a:off x="1643063" y="4786313"/>
+            <a:off x="1520825" y="4869160"/>
             <a:ext cx="5715000" cy="642937"/>
           </a:xfrm>
         </p:spPr>
@@ -4873,7 +4870,7 @@
                 <a:latin typeface="Arial" charset="0"/>
                 <a:ea typeface="ＭＳ Ｐゴシック" charset="0"/>
               </a:rPr>
-              <a:t>情報工学科　篠埜　功</a:t>
+              <a:t>篠埜　功</a:t>
             </a:r>
           </a:p>
         </p:txBody>
@@ -4900,14 +4897,14 @@
           </a:ln>
           <a:extLst>
             <a:ext uri="{909E8E84-426E-40dd-AFC4-6F175D3DCCD1}">
-              <a14:hiddenFill xmlns:a14="http://schemas.microsoft.com/office/drawing/2010/main">
+              <a14:hiddenFill xmlns:a14="http://schemas.microsoft.com/office/drawing/2010/main" xmlns="">
                 <a:solidFill>
                   <a:srgbClr val="FFFFFF"/>
                 </a:solidFill>
               </a14:hiddenFill>
             </a:ext>
             <a:ext uri="{91240B29-F687-4f45-9708-019B960494DF}">
-              <a14:hiddenLine xmlns:a14="http://schemas.microsoft.com/office/drawing/2010/main" w="9525">
+              <a14:hiddenLine xmlns:a14="http://schemas.microsoft.com/office/drawing/2010/main" xmlns="" w="9525">
                 <a:solidFill>
                   <a:srgbClr val="000000"/>
                 </a:solidFill>
@@ -4926,7 +4923,7 @@
           <a:p>
             <a:pPr algn="ctr"/>
             <a:r>
-              <a:rPr lang="ja-JP" altLang="en-US" sz="3200" b="0" dirty="0" smtClean="0"/>
+              <a:rPr lang="ja-JP" altLang="en-US" sz="3200" b="0" dirty="0"/>
               <a:t>第</a:t>
             </a:r>
             <a:r>
@@ -4934,12 +4931,8 @@
               <a:t>8</a:t>
             </a:r>
             <a:r>
-              <a:rPr lang="ja-JP" altLang="en-US" sz="3200" b="0" dirty="0" smtClean="0"/>
-              <a:t>回</a:t>
-            </a:r>
-            <a:r>
               <a:rPr lang="ja-JP" altLang="en-US" sz="3200" b="0" dirty="0"/>
-              <a:t>　型</a:t>
+              <a:t>回　型</a:t>
             </a:r>
             <a:endParaRPr lang="en-US" altLang="ja-JP" sz="3200" b="0" dirty="0"/>
           </a:p>
@@ -4950,13 +4943,6 @@
   <p:clrMapOvr>
     <a:masterClrMapping/>
   </p:clrMapOvr>
-  <p:timing>
-    <p:tnLst>
-      <p:par>
-        <p:cTn xmlns:p14="http://schemas.microsoft.com/office/powerpoint/2010/main" id="1" dur="indefinite" restart="never" nodeType="tmRoot"/>
-      </p:par>
-    </p:tnLst>
-  </p:timing>
 </p:sld>
 </file>
 
@@ -4997,14 +4983,7 @@
                 <a:latin typeface="Arial" charset="0"/>
                 <a:ea typeface="ＭＳ Ｐゴシック" charset="0"/>
               </a:rPr>
-              <a:t>練習</a:t>
-            </a:r>
-            <a:r>
-              <a:rPr lang="ja-JP" altLang="en-US" dirty="0" smtClean="0">
-                <a:latin typeface="Arial" charset="0"/>
-                <a:ea typeface="ＭＳ Ｐゴシック" charset="0"/>
-              </a:rPr>
-              <a:t>問題</a:t>
+              <a:t>練習問題</a:t>
             </a:r>
             <a:r>
               <a:rPr lang="en-US" altLang="ja-JP" dirty="0">
@@ -5040,20 +5019,20 @@
               <a:buNone/>
             </a:pPr>
             <a:r>
-              <a:rPr lang="en-US" altLang="ja-JP" dirty="0" smtClean="0">
+              <a:rPr lang="en-US" altLang="ja-JP" dirty="0">
                 <a:latin typeface="Arial" charset="0"/>
                 <a:ea typeface="ＭＳ Ｐゴシック" charset="0"/>
               </a:rPr>
               <a:t>C</a:t>
             </a:r>
             <a:r>
-              <a:rPr lang="ja-JP" altLang="en-US" dirty="0" smtClean="0">
+              <a:rPr lang="ja-JP" altLang="en-US" dirty="0">
                 <a:latin typeface="Arial" charset="0"/>
                 <a:ea typeface="ＭＳ Ｐゴシック" charset="0"/>
               </a:rPr>
               <a:t>言語の変数宣言</a:t>
             </a:r>
-            <a:endParaRPr lang="en-US" altLang="ja-JP" dirty="0" smtClean="0">
+            <a:endParaRPr lang="en-US" altLang="ja-JP" dirty="0">
               <a:latin typeface="Arial" charset="0"/>
               <a:ea typeface="ＭＳ Ｐゴシック" charset="0"/>
             </a:endParaRPr>
@@ -5064,18 +5043,11 @@
               <a:buNone/>
             </a:pPr>
             <a:r>
-              <a:rPr lang="en-US" altLang="ja-JP" dirty="0" smtClean="0">
-                <a:latin typeface="Arial" charset="0"/>
-                <a:ea typeface="ＭＳ Ｐゴシック" charset="0"/>
-              </a:rPr>
-              <a:t>(</a:t>
-            </a:r>
-            <a:r>
               <a:rPr lang="en-US" altLang="ja-JP" dirty="0">
                 <a:latin typeface="Arial" charset="0"/>
                 <a:ea typeface="ＭＳ Ｐゴシック" charset="0"/>
               </a:rPr>
-              <a:t>1) </a:t>
+              <a:t>(1) </a:t>
             </a:r>
             <a:r>
               <a:rPr lang="en-US" altLang="ja-JP" dirty="0" err="1">
@@ -5116,21 +5088,7 @@
                 <a:latin typeface="Arial" charset="0"/>
                 <a:ea typeface="ＭＳ Ｐゴシック" charset="0"/>
               </a:rPr>
-              <a:t> c </a:t>
-            </a:r>
-            <a:r>
-              <a:rPr lang="en-US" altLang="ja-JP" dirty="0" smtClean="0">
-                <a:latin typeface="Arial" charset="0"/>
-                <a:ea typeface="ＭＳ Ｐゴシック" charset="0"/>
-              </a:rPr>
-              <a:t>[13]</a:t>
-            </a:r>
-            <a:r>
-              <a:rPr lang="en-US" altLang="ja-JP" dirty="0">
-                <a:latin typeface="Arial" charset="0"/>
-                <a:ea typeface="ＭＳ Ｐゴシック" charset="0"/>
-              </a:rPr>
-              <a:t>;</a:t>
+              <a:t> c [13];</a:t>
             </a:r>
           </a:p>
           <a:p>
@@ -5153,13 +5111,6 @@
   <p:clrMapOvr>
     <a:masterClrMapping/>
   </p:clrMapOvr>
-  <p:timing>
-    <p:tnLst>
-      <p:par>
-        <p:cTn xmlns:p14="http://schemas.microsoft.com/office/powerpoint/2010/main" id="1" dur="indefinite" restart="never" nodeType="tmRoot"/>
-      </p:par>
-    </p:tnLst>
-  </p:timing>
 </p:sld>
 </file>
 
@@ -5200,17 +5151,10 @@
                 <a:latin typeface="Arial" charset="0"/>
                 <a:ea typeface="ＭＳ Ｐゴシック" charset="0"/>
               </a:rPr>
-              <a:t>練習</a:t>
-            </a:r>
-            <a:r>
-              <a:rPr lang="ja-JP" altLang="en-US" dirty="0" smtClean="0">
-                <a:latin typeface="Arial" charset="0"/>
-                <a:ea typeface="ＭＳ Ｐゴシック" charset="0"/>
-              </a:rPr>
-              <a:t>問題</a:t>
-            </a:r>
-            <a:r>
-              <a:rPr lang="en-US" altLang="ja-JP" dirty="0" smtClean="0">
+              <a:t>練習問題</a:t>
+            </a:r>
+            <a:r>
+              <a:rPr lang="en-US" altLang="ja-JP" dirty="0">
                 <a:latin typeface="Arial" charset="0"/>
                 <a:ea typeface="ＭＳ Ｐゴシック" charset="0"/>
               </a:rPr>
@@ -5253,16 +5197,9 @@
                 <a:latin typeface="Arial" charset="0"/>
                 <a:ea typeface="ＭＳ Ｐゴシック" charset="0"/>
               </a:rPr>
-              <a:t>言語の変数</a:t>
-            </a:r>
-            <a:r>
-              <a:rPr lang="ja-JP" altLang="en-US" dirty="0" smtClean="0">
-                <a:latin typeface="Arial" charset="0"/>
-                <a:ea typeface="ＭＳ Ｐゴシック" charset="0"/>
-              </a:rPr>
-              <a:t>宣言</a:t>
-            </a:r>
-            <a:endParaRPr lang="en-US" altLang="ja-JP" dirty="0" smtClean="0">
+              <a:t>言語の変数宣言</a:t>
+            </a:r>
+            <a:endParaRPr lang="en-US" altLang="ja-JP" dirty="0">
               <a:latin typeface="Arial" charset="0"/>
               <a:ea typeface="ＭＳ Ｐゴシック" charset="0"/>
             </a:endParaRPr>
@@ -5273,18 +5210,11 @@
               <a:buNone/>
             </a:pPr>
             <a:r>
-              <a:rPr lang="en-US" altLang="ja-JP" dirty="0" smtClean="0">
-                <a:latin typeface="Arial" charset="0"/>
-                <a:ea typeface="ＭＳ Ｐゴシック" charset="0"/>
-              </a:rPr>
-              <a:t>(</a:t>
-            </a:r>
-            <a:r>
               <a:rPr lang="en-US" altLang="ja-JP" dirty="0">
                 <a:latin typeface="Arial" charset="0"/>
                 <a:ea typeface="ＭＳ Ｐゴシック" charset="0"/>
               </a:rPr>
-              <a:t>1) </a:t>
+              <a:t>(1) </a:t>
             </a:r>
             <a:r>
               <a:rPr lang="en-US" altLang="ja-JP" dirty="0" err="1">
@@ -5318,28 +5248,14 @@
                 <a:latin typeface="Arial" charset="0"/>
                 <a:ea typeface="ＭＳ Ｐゴシック" charset="0"/>
               </a:rPr>
-              <a:t>i</a:t>
-            </a:r>
-            <a:r>
-              <a:rPr lang="en-US" altLang="ja-JP" dirty="0" err="1" smtClean="0">
-                <a:latin typeface="Arial" charset="0"/>
-                <a:ea typeface="ＭＳ Ｐゴシック" charset="0"/>
-              </a:rPr>
-              <a:t>nt</a:t>
-            </a:r>
-            <a:r>
-              <a:rPr lang="en-US" altLang="ja-JP" dirty="0" smtClean="0">
-                <a:latin typeface="Arial" charset="0"/>
-                <a:ea typeface="ＭＳ Ｐゴシック" charset="0"/>
-              </a:rPr>
-              <a:t> </a:t>
+              <a:t>int</a:t>
             </a:r>
             <a:r>
               <a:rPr lang="en-US" altLang="ja-JP" dirty="0">
                 <a:latin typeface="Arial" charset="0"/>
                 <a:ea typeface="ＭＳ Ｐゴシック" charset="0"/>
               </a:rPr>
-              <a:t>b[2][13];</a:t>
+              <a:t> b[2][13];</a:t>
             </a:r>
           </a:p>
           <a:p>
@@ -5362,13 +5278,6 @@
   <p:clrMapOvr>
     <a:masterClrMapping/>
   </p:clrMapOvr>
-  <p:timing>
-    <p:tnLst>
-      <p:par>
-        <p:cTn xmlns:p14="http://schemas.microsoft.com/office/powerpoint/2010/main" id="1" dur="indefinite" restart="never" nodeType="tmRoot"/>
-      </p:par>
-    </p:tnLst>
-  </p:timing>
 </p:sld>
 </file>
 
@@ -5448,21 +5357,7 @@
                 <a:latin typeface="Arial" charset="0"/>
                 <a:ea typeface="ＭＳ Ｐゴシック" charset="0"/>
               </a:rPr>
-              <a:t>char ( * ( * y [3] ) ( ) ) </a:t>
-            </a:r>
-            <a:r>
-              <a:rPr lang="en-US" altLang="ja-JP" dirty="0" smtClean="0">
-                <a:latin typeface="Arial" charset="0"/>
-                <a:ea typeface="ＭＳ Ｐゴシック" charset="0"/>
-              </a:rPr>
-              <a:t>[5]  </a:t>
-            </a:r>
-            <a:r>
-              <a:rPr lang="en-US" altLang="ja-JP" dirty="0">
-                <a:latin typeface="Arial" charset="0"/>
-                <a:ea typeface="ＭＳ Ｐゴシック" charset="0"/>
-              </a:rPr>
-              <a:t>;</a:t>
+              <a:t>char ( * ( * y [3] ) ( ) ) [5]  ;</a:t>
             </a:r>
           </a:p>
           <a:p>
@@ -5506,14 +5401,7 @@
                 <a:latin typeface="Arial" charset="0"/>
                 <a:ea typeface="ＭＳ Ｐゴシック" charset="0"/>
               </a:rPr>
-              <a:t>y </a:t>
-            </a:r>
-            <a:r>
-              <a:rPr lang="en-US" altLang="ja-JP" dirty="0" smtClean="0">
-                <a:latin typeface="Arial" charset="0"/>
-                <a:ea typeface="ＭＳ Ｐゴシック" charset="0"/>
-              </a:rPr>
-              <a:t>[2] </a:t>
+              <a:t>y [2] </a:t>
             </a:r>
             <a:r>
               <a:rPr lang="ja-JP" altLang="en-US" dirty="0">
@@ -5547,21 +5435,7 @@
                 <a:latin typeface="Arial" charset="0"/>
                 <a:ea typeface="ＭＳ Ｐゴシック" charset="0"/>
               </a:rPr>
-              <a:t> y : char </a:t>
-            </a:r>
-            <a:r>
-              <a:rPr lang="en-US" altLang="ja-JP" dirty="0" smtClean="0">
-                <a:latin typeface="Arial" charset="0"/>
-                <a:ea typeface="ＭＳ Ｐゴシック" charset="0"/>
-              </a:rPr>
-              <a:t>[5]  </a:t>
-            </a:r>
-            <a:r>
-              <a:rPr lang="en-US" altLang="ja-JP" dirty="0">
-                <a:latin typeface="Arial" charset="0"/>
-                <a:ea typeface="ＭＳ Ｐゴシック" charset="0"/>
-              </a:rPr>
-              <a:t>*  ( )  *  [3]</a:t>
+              <a:t> y : char [5]  *  ( )  *  [3]</a:t>
             </a:r>
           </a:p>
           <a:p>
@@ -5619,21 +5493,7 @@
                 <a:latin typeface="Arial" charset="0"/>
                 <a:ea typeface="ＭＳ Ｐゴシック" charset="0"/>
               </a:rPr>
-              <a:t>: char </a:t>
-            </a:r>
-            <a:r>
-              <a:rPr lang="en-US" altLang="ja-JP" dirty="0" smtClean="0">
-                <a:latin typeface="Arial" charset="0"/>
-                <a:ea typeface="ＭＳ Ｐゴシック" charset="0"/>
-              </a:rPr>
-              <a:t>[5] </a:t>
-            </a:r>
-            <a:r>
-              <a:rPr lang="en-US" altLang="ja-JP" dirty="0">
-                <a:latin typeface="Arial" charset="0"/>
-                <a:ea typeface="ＭＳ Ｐゴシック" charset="0"/>
-              </a:rPr>
-              <a:t>* ( ) *</a:t>
+              <a:t>: char [5] * ( ) *</a:t>
             </a:r>
           </a:p>
           <a:p>
@@ -5680,13 +5540,6 @@
   <p:clrMapOvr>
     <a:masterClrMapping/>
   </p:clrMapOvr>
-  <p:timing>
-    <p:tnLst>
-      <p:par>
-        <p:cTn xmlns:p14="http://schemas.microsoft.com/office/powerpoint/2010/main" id="1" dur="indefinite" restart="never" nodeType="tmRoot"/>
-      </p:par>
-    </p:tnLst>
-  </p:timing>
 </p:sld>
 </file>
 
@@ -5727,17 +5580,10 @@
                 <a:latin typeface="Arial" charset="0"/>
                 <a:ea typeface="ＭＳ Ｐゴシック" charset="0"/>
               </a:rPr>
-              <a:t>練習</a:t>
-            </a:r>
-            <a:r>
-              <a:rPr lang="ja-JP" altLang="en-US" dirty="0" smtClean="0">
-                <a:latin typeface="Arial" charset="0"/>
-                <a:ea typeface="ＭＳ Ｐゴシック" charset="0"/>
-              </a:rPr>
-              <a:t>問題</a:t>
-            </a:r>
-            <a:r>
-              <a:rPr lang="en-US" altLang="ja-JP" dirty="0" smtClean="0">
+              <a:t>練習問題</a:t>
+            </a:r>
+            <a:r>
+              <a:rPr lang="en-US" altLang="ja-JP" dirty="0">
                 <a:latin typeface="Arial" charset="0"/>
                 <a:ea typeface="ＭＳ Ｐゴシック" charset="0"/>
               </a:rPr>
@@ -5770,20 +5616,20 @@
               <a:buNone/>
             </a:pPr>
             <a:r>
-              <a:rPr lang="en-US" altLang="ja-JP" dirty="0" smtClean="0">
+              <a:rPr lang="en-US" altLang="ja-JP" dirty="0">
                 <a:latin typeface="Arial" charset="0"/>
                 <a:ea typeface="ＭＳ Ｐゴシック" charset="0"/>
               </a:rPr>
               <a:t>C</a:t>
             </a:r>
             <a:r>
-              <a:rPr lang="ja-JP" altLang="en-US" dirty="0" smtClean="0">
+              <a:rPr lang="ja-JP" altLang="en-US" dirty="0">
                 <a:latin typeface="Arial" charset="0"/>
                 <a:ea typeface="ＭＳ Ｐゴシック" charset="0"/>
               </a:rPr>
               <a:t>言語の変数宣言</a:t>
             </a:r>
-            <a:endParaRPr lang="en-US" altLang="ja-JP" dirty="0" smtClean="0">
+            <a:endParaRPr lang="en-US" altLang="ja-JP" dirty="0">
               <a:latin typeface="Arial" charset="0"/>
               <a:ea typeface="ＭＳ Ｐゴシック" charset="0"/>
             </a:endParaRPr>
@@ -5794,7 +5640,7 @@
               <a:buNone/>
             </a:pPr>
             <a:r>
-              <a:rPr lang="en-US" altLang="ja-JP" dirty="0" smtClean="0">
+              <a:rPr lang="en-US" altLang="ja-JP" dirty="0">
                 <a:latin typeface="Arial" charset="0"/>
                 <a:ea typeface="ＭＳ Ｐゴシック" charset="0"/>
               </a:rPr>
@@ -5821,25 +5667,11 @@
               <a:buNone/>
             </a:pPr>
             <a:r>
-              <a:rPr lang="ja-JP" altLang="en-US" dirty="0" smtClean="0">
-                <a:latin typeface="Arial" charset="0"/>
-                <a:ea typeface="ＭＳ Ｐゴシック" charset="0"/>
-              </a:rPr>
-              <a:t>のもと</a:t>
-            </a:r>
-            <a:r>
               <a:rPr lang="ja-JP" altLang="en-US" dirty="0">
                 <a:latin typeface="Arial" charset="0"/>
                 <a:ea typeface="ＭＳ Ｐゴシック" charset="0"/>
               </a:rPr>
-              <a:t>で</a:t>
-            </a:r>
-            <a:r>
-              <a:rPr lang="ja-JP" altLang="en-US" dirty="0" smtClean="0">
-                <a:latin typeface="Arial" charset="0"/>
-                <a:ea typeface="ＭＳ Ｐゴシック" charset="0"/>
-              </a:rPr>
-              <a:t>、式  </a:t>
+              <a:t>のもとで、式  </a:t>
             </a:r>
             <a:r>
               <a:rPr lang="en-US" altLang="ja-JP" dirty="0">
@@ -5867,13 +5699,6 @@
   <p:clrMapOvr>
     <a:masterClrMapping/>
   </p:clrMapOvr>
-  <p:timing>
-    <p:tnLst>
-      <p:par>
-        <p:cTn xmlns:p14="http://schemas.microsoft.com/office/powerpoint/2010/main" id="1" dur="indefinite" restart="never" nodeType="tmRoot"/>
-      </p:par>
-    </p:tnLst>
-  </p:timing>
 </p:sld>
 </file>
 
@@ -6030,7 +5855,7 @@
           </a:ln>
           <a:extLst>
             <a:ext uri="{909E8E84-426E-40dd-AFC4-6F175D3DCCD1}">
-              <a14:hiddenFill xmlns:a14="http://schemas.microsoft.com/office/drawing/2010/main">
+              <a14:hiddenFill xmlns:a14="http://schemas.microsoft.com/office/drawing/2010/main" xmlns="">
                 <a:noFill/>
               </a14:hiddenFill>
             </a:ext>
@@ -6059,14 +5884,14 @@
           </a:ln>
           <a:extLst>
             <a:ext uri="{909E8E84-426E-40dd-AFC4-6F175D3DCCD1}">
-              <a14:hiddenFill xmlns:a14="http://schemas.microsoft.com/office/drawing/2010/main">
+              <a14:hiddenFill xmlns:a14="http://schemas.microsoft.com/office/drawing/2010/main" xmlns="">
                 <a:solidFill>
                   <a:srgbClr val="FFFFFF"/>
                 </a:solidFill>
               </a14:hiddenFill>
             </a:ext>
             <a:ext uri="{91240B29-F687-4f45-9708-019B960494DF}">
-              <a14:hiddenLine xmlns:a14="http://schemas.microsoft.com/office/drawing/2010/main" w="9525">
+              <a14:hiddenLine xmlns:a14="http://schemas.microsoft.com/office/drawing/2010/main" xmlns="" w="9525">
                 <a:solidFill>
                   <a:srgbClr val="000000"/>
                 </a:solidFill>
@@ -6265,7 +6090,7 @@
           </a:ln>
           <a:extLst>
             <a:ext uri="{909E8E84-426E-40dd-AFC4-6F175D3DCCD1}">
-              <a14:hiddenFill xmlns:a14="http://schemas.microsoft.com/office/drawing/2010/main">
+              <a14:hiddenFill xmlns:a14="http://schemas.microsoft.com/office/drawing/2010/main" xmlns="">
                 <a:noFill/>
               </a14:hiddenFill>
             </a:ext>
@@ -6294,14 +6119,14 @@
           </a:ln>
           <a:extLst>
             <a:ext uri="{909E8E84-426E-40dd-AFC4-6F175D3DCCD1}">
-              <a14:hiddenFill xmlns:a14="http://schemas.microsoft.com/office/drawing/2010/main">
+              <a14:hiddenFill xmlns:a14="http://schemas.microsoft.com/office/drawing/2010/main" xmlns="">
                 <a:solidFill>
                   <a:srgbClr val="FFFFFF"/>
                 </a:solidFill>
               </a14:hiddenFill>
             </a:ext>
             <a:ext uri="{91240B29-F687-4f45-9708-019B960494DF}">
-              <a14:hiddenLine xmlns:a14="http://schemas.microsoft.com/office/drawing/2010/main" w="9525">
+              <a14:hiddenLine xmlns:a14="http://schemas.microsoft.com/office/drawing/2010/main" xmlns="" w="9525">
                 <a:solidFill>
                   <a:srgbClr val="000000"/>
                 </a:solidFill>
@@ -6500,7 +6325,7 @@
           </a:ln>
           <a:extLst>
             <a:ext uri="{909E8E84-426E-40dd-AFC4-6F175D3DCCD1}">
-              <a14:hiddenFill xmlns:a14="http://schemas.microsoft.com/office/drawing/2010/main">
+              <a14:hiddenFill xmlns:a14="http://schemas.microsoft.com/office/drawing/2010/main" xmlns="">
                 <a:noFill/>
               </a14:hiddenFill>
             </a:ext>
@@ -6533,7 +6358,7 @@
               <a:defRPr/>
             </a:pPr>
             <a:r>
-              <a:rPr lang="en-US" altLang="ja-JP" sz="3200" b="0" dirty="0" smtClean="0">
+              <a:rPr lang="en-US" altLang="ja-JP" sz="3200" b="0" dirty="0">
                 <a:ea typeface="ＭＳ Ｐゴシック" pitchFamily="80" charset="-128"/>
                 <a:cs typeface="+mn-cs"/>
               </a:rPr>
@@ -6592,14 +6417,14 @@
           </a:ln>
           <a:extLst>
             <a:ext uri="{909E8E84-426E-40dd-AFC4-6F175D3DCCD1}">
-              <a14:hiddenFill xmlns:a14="http://schemas.microsoft.com/office/drawing/2010/main">
+              <a14:hiddenFill xmlns:a14="http://schemas.microsoft.com/office/drawing/2010/main" xmlns="">
                 <a:solidFill>
                   <a:srgbClr val="FFFFFF"/>
                 </a:solidFill>
               </a14:hiddenFill>
             </a:ext>
             <a:ext uri="{91240B29-F687-4f45-9708-019B960494DF}">
-              <a14:hiddenLine xmlns:a14="http://schemas.microsoft.com/office/drawing/2010/main" w="9525">
+              <a14:hiddenLine xmlns:a14="http://schemas.microsoft.com/office/drawing/2010/main" xmlns="" w="9525">
                 <a:solidFill>
                   <a:srgbClr val="000000"/>
                 </a:solidFill>
@@ -6749,13 +6574,6 @@
   <p:clrMapOvr>
     <a:masterClrMapping/>
   </p:clrMapOvr>
-  <p:timing>
-    <p:tnLst>
-      <p:par>
-        <p:cTn xmlns:p14="http://schemas.microsoft.com/office/powerpoint/2010/main" id="1" dur="indefinite" restart="never" nodeType="tmRoot"/>
-      </p:par>
-    </p:tnLst>
-  </p:timing>
 </p:sld>
 </file>
 
@@ -6831,21 +6649,21 @@
               <a:buNone/>
             </a:pPr>
             <a:r>
-              <a:rPr lang="en-US" altLang="ja-JP" sz="2800" dirty="0" smtClean="0">
+              <a:rPr lang="en-US" altLang="ja-JP" sz="2800" dirty="0">
                 <a:latin typeface="Arial" charset="0"/>
                 <a:ea typeface="ＭＳ Ｐゴシック" charset="0"/>
               </a:rPr>
               <a:t>C</a:t>
             </a:r>
             <a:r>
-              <a:rPr lang="ja-JP" altLang="en-US" sz="2800" dirty="0" smtClean="0">
+              <a:rPr lang="ja-JP" altLang="en-US" sz="2800" dirty="0">
                 <a:latin typeface="Arial" charset="0"/>
                 <a:ea typeface="ＭＳ Ｐゴシック" charset="0"/>
               </a:rPr>
               <a:t>言語の変数宣言</a:t>
             </a:r>
             <a:r>
-              <a:rPr lang="en-US" altLang="ja-JP" sz="2800" dirty="0" smtClean="0">
+              <a:rPr lang="en-US" altLang="ja-JP" sz="2800" dirty="0">
                 <a:latin typeface="Arial" charset="0"/>
                 <a:ea typeface="ＭＳ Ｐゴシック" charset="0"/>
               </a:rPr>
@@ -6858,32 +6676,25 @@
               <a:buNone/>
             </a:pPr>
             <a:r>
-              <a:rPr lang="en-US" altLang="ja-JP" sz="2800" dirty="0" smtClean="0">
+              <a:rPr lang="en-US" altLang="ja-JP" sz="2800" dirty="0">
                 <a:latin typeface="Arial" charset="0"/>
                 <a:ea typeface="ＭＳ Ｐゴシック" charset="0"/>
               </a:rPr>
               <a:t>    </a:t>
             </a:r>
             <a:r>
-              <a:rPr lang="en-US" altLang="ja-JP" sz="2800" dirty="0" err="1" smtClean="0">
+              <a:rPr lang="en-US" altLang="ja-JP" sz="2800" dirty="0" err="1">
                 <a:latin typeface="Arial" charset="0"/>
                 <a:ea typeface="ＭＳ Ｐゴシック" charset="0"/>
               </a:rPr>
               <a:t>int</a:t>
             </a:r>
             <a:r>
-              <a:rPr lang="en-US" altLang="ja-JP" sz="2800" dirty="0" smtClean="0">
-                <a:latin typeface="Arial" charset="0"/>
-                <a:ea typeface="ＭＳ Ｐゴシック" charset="0"/>
-              </a:rPr>
-              <a:t>  </a:t>
-            </a:r>
-            <a:r>
               <a:rPr lang="en-US" altLang="ja-JP" sz="2800" dirty="0">
                 <a:latin typeface="Arial" charset="0"/>
                 <a:ea typeface="ＭＳ Ｐゴシック" charset="0"/>
               </a:rPr>
-              <a:t>(*a) [13] ;</a:t>
+              <a:t>  (*a) [13] ;</a:t>
             </a:r>
           </a:p>
           <a:p>
@@ -6892,25 +6703,11 @@
               <a:buNone/>
             </a:pPr>
             <a:r>
-              <a:rPr lang="ja-JP" altLang="en-US" sz="2800" dirty="0" smtClean="0">
-                <a:latin typeface="Arial" charset="0"/>
-                <a:ea typeface="ＭＳ Ｐゴシック" charset="0"/>
-              </a:rPr>
-              <a:t>のもと</a:t>
-            </a:r>
-            <a:r>
               <a:rPr lang="ja-JP" altLang="en-US" sz="2800" dirty="0">
                 <a:latin typeface="Arial" charset="0"/>
                 <a:ea typeface="ＭＳ Ｐゴシック" charset="0"/>
               </a:rPr>
-              <a:t>で</a:t>
-            </a:r>
-            <a:r>
-              <a:rPr lang="ja-JP" altLang="en-US" sz="2800" dirty="0" smtClean="0">
-                <a:latin typeface="Arial" charset="0"/>
-                <a:ea typeface="ＭＳ Ｐゴシック" charset="0"/>
-              </a:rPr>
-              <a:t>、式  </a:t>
+              <a:t>のもとで、式  </a:t>
             </a:r>
             <a:r>
               <a:rPr lang="en-US" altLang="ja-JP" sz="2800" dirty="0">
@@ -6941,60 +6738,25 @@
               <a:t> [13]</a:t>
             </a:r>
             <a:r>
-              <a:rPr lang="ja-JP" altLang="en-US" sz="2800" dirty="0" smtClean="0">
+              <a:rPr lang="ja-JP" altLang="en-US" sz="2800" dirty="0">
                 <a:latin typeface="Arial" charset="0"/>
                 <a:ea typeface="ＭＳ Ｐゴシック" charset="0"/>
               </a:rPr>
               <a:t>であった（練習問題</a:t>
             </a:r>
             <a:r>
-              <a:rPr lang="en-US" altLang="ja-JP" sz="2800" dirty="0" smtClean="0">
+              <a:rPr lang="en-US" altLang="ja-JP" sz="2800" dirty="0">
                 <a:latin typeface="Arial" charset="0"/>
                 <a:ea typeface="ＭＳ Ｐゴシック" charset="0"/>
               </a:rPr>
               <a:t>4</a:t>
             </a:r>
             <a:r>
-              <a:rPr lang="ja-JP" altLang="en-US" sz="2800" dirty="0" smtClean="0">
-                <a:latin typeface="Arial" charset="0"/>
-                <a:ea typeface="ＭＳ Ｐゴシック" charset="0"/>
-              </a:rPr>
-              <a:t>参照）。これ</a:t>
-            </a:r>
-            <a:r>
               <a:rPr lang="ja-JP" altLang="en-US" sz="2800" dirty="0">
                 <a:latin typeface="Arial" charset="0"/>
                 <a:ea typeface="ＭＳ Ｐゴシック" charset="0"/>
               </a:rPr>
-              <a:t>を、</a:t>
-            </a:r>
-            <a:r>
-              <a:rPr lang="ja-JP" altLang="en-US" sz="2800" dirty="0" smtClean="0">
-                <a:latin typeface="Arial" charset="0"/>
-                <a:ea typeface="ＭＳ Ｐゴシック" charset="0"/>
-              </a:rPr>
-              <a:t>型の後置記法による宣言</a:t>
-            </a:r>
-            <a:r>
-              <a:rPr lang="ja-JP" altLang="en-US" sz="2800" dirty="0">
-                <a:latin typeface="Arial" charset="0"/>
-                <a:ea typeface="ＭＳ Ｐゴシック" charset="0"/>
-              </a:rPr>
-              <a:t>から推論規則</a:t>
-            </a:r>
-            <a:r>
-              <a:rPr lang="ja-JP" altLang="en-US" sz="2800" dirty="0" smtClean="0">
-                <a:latin typeface="Arial" charset="0"/>
-                <a:ea typeface="ＭＳ Ｐゴシック" charset="0"/>
-              </a:rPr>
-              <a:t>で以下のようにして導く</a:t>
-            </a:r>
-            <a:r>
-              <a:rPr lang="ja-JP" altLang="en-US" sz="2800" dirty="0">
-                <a:latin typeface="Arial" charset="0"/>
-                <a:ea typeface="ＭＳ Ｐゴシック" charset="0"/>
-              </a:rPr>
-              <a:t>ことができる。</a:t>
+              <a:t>参照）。これを、型の後置記法による宣言から推論規則で以下のようにして導くことができる。</a:t>
             </a:r>
             <a:endParaRPr lang="en-US" altLang="ja-JP" sz="2800" dirty="0">
               <a:latin typeface="Arial" charset="0"/>
@@ -7055,14 +6817,14 @@
           </a:ln>
           <a:extLst>
             <a:ext uri="{909E8E84-426E-40dd-AFC4-6F175D3DCCD1}">
-              <a14:hiddenFill xmlns:a14="http://schemas.microsoft.com/office/drawing/2010/main">
+              <a14:hiddenFill xmlns:a14="http://schemas.microsoft.com/office/drawing/2010/main" xmlns="">
                 <a:solidFill>
                   <a:srgbClr val="FFFFFF"/>
                 </a:solidFill>
               </a14:hiddenFill>
             </a:ext>
             <a:ext uri="{91240B29-F687-4f45-9708-019B960494DF}">
-              <a14:hiddenLine xmlns:a14="http://schemas.microsoft.com/office/drawing/2010/main" w="9525">
+              <a14:hiddenLine xmlns:a14="http://schemas.microsoft.com/office/drawing/2010/main" xmlns="" w="9525">
                 <a:solidFill>
                   <a:srgbClr val="000000"/>
                 </a:solidFill>
@@ -7245,7 +7007,7 @@
           </a:ln>
           <a:extLst>
             <a:ext uri="{909E8E84-426E-40dd-AFC4-6F175D3DCCD1}">
-              <a14:hiddenFill xmlns:a14="http://schemas.microsoft.com/office/drawing/2010/main">
+              <a14:hiddenFill xmlns:a14="http://schemas.microsoft.com/office/drawing/2010/main" xmlns="">
                 <a:noFill/>
               </a14:hiddenFill>
             </a:ext>
@@ -7332,20 +7094,20 @@
               <a:buNone/>
             </a:pPr>
             <a:r>
-              <a:rPr lang="en-US" altLang="ja-JP" sz="2800" dirty="0" smtClean="0">
+              <a:rPr lang="en-US" altLang="ja-JP" sz="2800" dirty="0">
                 <a:latin typeface="Arial" charset="0"/>
                 <a:ea typeface="ＭＳ Ｐゴシック" charset="0"/>
               </a:rPr>
               <a:t>C</a:t>
             </a:r>
             <a:r>
-              <a:rPr lang="ja-JP" altLang="en-US" sz="2800" dirty="0" smtClean="0">
+              <a:rPr lang="ja-JP" altLang="en-US" sz="2800" dirty="0">
                 <a:latin typeface="Arial" charset="0"/>
                 <a:ea typeface="ＭＳ Ｐゴシック" charset="0"/>
               </a:rPr>
               <a:t>言語の変数宣言</a:t>
             </a:r>
-            <a:endParaRPr lang="en-US" altLang="ja-JP" sz="2800" dirty="0" smtClean="0">
+            <a:endParaRPr lang="en-US" altLang="ja-JP" sz="2800" dirty="0">
               <a:latin typeface="Arial" charset="0"/>
               <a:ea typeface="ＭＳ Ｐゴシック" charset="0"/>
             </a:endParaRPr>
@@ -7356,7 +7118,7 @@
               <a:buNone/>
             </a:pPr>
             <a:r>
-              <a:rPr lang="en-US" altLang="ja-JP" sz="2800" dirty="0" smtClean="0">
+              <a:rPr lang="en-US" altLang="ja-JP" sz="2800" dirty="0">
                 <a:latin typeface="Arial" charset="0"/>
                 <a:ea typeface="ＭＳ Ｐゴシック" charset="0"/>
               </a:rPr>
@@ -7383,25 +7145,11 @@
               <a:buNone/>
             </a:pPr>
             <a:r>
-              <a:rPr lang="ja-JP" altLang="en-US" sz="2800" dirty="0" smtClean="0">
-                <a:latin typeface="Arial" charset="0"/>
-                <a:ea typeface="ＭＳ Ｐゴシック" charset="0"/>
-              </a:rPr>
-              <a:t>のもと</a:t>
-            </a:r>
-            <a:r>
               <a:rPr lang="ja-JP" altLang="en-US" sz="2800" dirty="0">
                 <a:latin typeface="Arial" charset="0"/>
                 <a:ea typeface="ＭＳ Ｐゴシック" charset="0"/>
               </a:rPr>
-              <a:t>で</a:t>
-            </a:r>
-            <a:r>
-              <a:rPr lang="ja-JP" altLang="en-US" sz="2800" dirty="0" smtClean="0">
-                <a:latin typeface="Arial" charset="0"/>
-                <a:ea typeface="ＭＳ Ｐゴシック" charset="0"/>
-              </a:rPr>
-              <a:t>、式  </a:t>
+              <a:t>のもとで、式  </a:t>
             </a:r>
             <a:r>
               <a:rPr lang="en-US" altLang="ja-JP" sz="2800" dirty="0">
@@ -7411,70 +7159,42 @@
               <a:t>(*a) [3] </a:t>
             </a:r>
             <a:r>
-              <a:rPr lang="ja-JP" altLang="en-US" sz="2800" dirty="0" smtClean="0">
+              <a:rPr lang="ja-JP" altLang="en-US" sz="2800" dirty="0">
                 <a:latin typeface="Arial" charset="0"/>
                 <a:ea typeface="ＭＳ Ｐゴシック" charset="0"/>
               </a:rPr>
               <a:t>は</a:t>
             </a:r>
             <a:r>
-              <a:rPr lang="en-US" altLang="ja-JP" sz="2800" dirty="0" err="1" smtClean="0">
+              <a:rPr lang="en-US" altLang="ja-JP" sz="2800" dirty="0" err="1">
                 <a:latin typeface="Arial" charset="0"/>
                 <a:ea typeface="ＭＳ Ｐゴシック" charset="0"/>
               </a:rPr>
               <a:t>int</a:t>
             </a:r>
             <a:r>
-              <a:rPr lang="ja-JP" altLang="en-US" sz="2800" dirty="0" smtClean="0">
-                <a:latin typeface="Arial" charset="0"/>
-                <a:ea typeface="ＭＳ Ｐゴシック" charset="0"/>
-              </a:rPr>
-              <a:t>型である。これ</a:t>
-            </a:r>
-            <a:r>
               <a:rPr lang="ja-JP" altLang="en-US" sz="2800" dirty="0">
                 <a:latin typeface="Arial" charset="0"/>
                 <a:ea typeface="ＭＳ Ｐゴシック" charset="0"/>
               </a:rPr>
-              <a:t>を、</a:t>
-            </a:r>
-            <a:r>
-              <a:rPr lang="ja-JP" altLang="en-US" sz="2800" dirty="0" smtClean="0">
-                <a:latin typeface="Arial" charset="0"/>
-                <a:ea typeface="ＭＳ Ｐゴシック" charset="0"/>
-              </a:rPr>
-              <a:t>型の後置記法による宣言</a:t>
+              <a:t>型である。これを、型の後置記法による宣言から推論規則で</a:t>
+            </a:r>
+            <a:r>
+              <a:rPr lang="en-US" altLang="en-US" sz="2800" dirty="0">
+                <a:latin typeface="Arial" charset="0"/>
+                <a:ea typeface="ＭＳ Ｐゴシック" charset="0"/>
+              </a:rPr>
+              <a:t>以下の</a:t>
             </a:r>
             <a:r>
               <a:rPr lang="ja-JP" altLang="en-US" sz="2800" dirty="0">
                 <a:latin typeface="Arial" charset="0"/>
                 <a:ea typeface="ＭＳ Ｐゴシック" charset="0"/>
               </a:rPr>
-              <a:t>から推論規則</a:t>
-            </a:r>
-            <a:r>
-              <a:rPr lang="ja-JP" altLang="en-US" sz="2800" dirty="0" smtClean="0">
-                <a:latin typeface="Arial" charset="0"/>
-                <a:ea typeface="ＭＳ Ｐゴシック" charset="0"/>
-              </a:rPr>
-              <a:t>で</a:t>
-            </a:r>
-            <a:r>
-              <a:rPr lang="en-US" altLang="en-US" sz="2800" dirty="0" smtClean="0">
-                <a:latin typeface="Arial" charset="0"/>
-                <a:ea typeface="ＭＳ Ｐゴシック" charset="0"/>
-              </a:rPr>
-              <a:t>以下の</a:t>
-            </a:r>
-            <a:r>
-              <a:rPr lang="ja-JP" altLang="en-US" sz="2800" dirty="0" smtClean="0">
-                <a:latin typeface="Arial" charset="0"/>
-                <a:ea typeface="ＭＳ Ｐゴシック" charset="0"/>
-              </a:rPr>
               <a:t>よ</a:t>
             </a:r>
             <a:r>
-              <a:rPr lang="en-US" altLang="en-US" sz="2800" dirty="0" smtClean="0">
+              <a:rPr lang="en-US" altLang="en-US" sz="2800" dirty="0">
                 <a:latin typeface="Arial" charset="0"/>
                 <a:ea typeface="ＭＳ Ｐゴシック" charset="0"/>
               </a:rPr>
@@ -7529,14 +7249,14 @@
           </a:ln>
           <a:extLst>
             <a:ext uri="{909E8E84-426E-40dd-AFC4-6F175D3DCCD1}">
-              <a14:hiddenFill xmlns:a14="http://schemas.microsoft.com/office/drawing/2010/main">
+              <a14:hiddenFill xmlns:a14="http://schemas.microsoft.com/office/drawing/2010/main" xmlns="">
                 <a:solidFill>
                   <a:srgbClr val="FFFFFF"/>
                 </a:solidFill>
               </a14:hiddenFill>
             </a:ext>
             <a:ext uri="{91240B29-F687-4f45-9708-019B960494DF}">
-              <a14:hiddenLine xmlns:a14="http://schemas.microsoft.com/office/drawing/2010/main" w="9525">
+              <a14:hiddenLine xmlns:a14="http://schemas.microsoft.com/office/drawing/2010/main" xmlns="" w="9525">
                 <a:solidFill>
                   <a:srgbClr val="000000"/>
                 </a:solidFill>
@@ -7707,7 +7427,7 @@
           </a:ln>
           <a:extLst>
             <a:ext uri="{909E8E84-426E-40dd-AFC4-6F175D3DCCD1}">
-              <a14:hiddenFill xmlns:a14="http://schemas.microsoft.com/office/drawing/2010/main">
+              <a14:hiddenFill xmlns:a14="http://schemas.microsoft.com/office/drawing/2010/main" xmlns="">
                 <a:noFill/>
               </a14:hiddenFill>
             </a:ext>
@@ -7741,7 +7461,7 @@
           </a:ln>
           <a:extLst>
             <a:ext uri="{909E8E84-426E-40dd-AFC4-6F175D3DCCD1}">
-              <a14:hiddenFill xmlns:a14="http://schemas.microsoft.com/office/drawing/2010/main">
+              <a14:hiddenFill xmlns:a14="http://schemas.microsoft.com/office/drawing/2010/main" xmlns="">
                 <a:noFill/>
               </a14:hiddenFill>
             </a:ext>
@@ -7798,17 +7518,10 @@
                 <a:latin typeface="Arial" charset="0"/>
                 <a:ea typeface="ＭＳ Ｐゴシック" charset="0"/>
               </a:rPr>
-              <a:t>練習</a:t>
-            </a:r>
-            <a:r>
-              <a:rPr lang="ja-JP" altLang="en-US" dirty="0" smtClean="0">
-                <a:latin typeface="Arial" charset="0"/>
-                <a:ea typeface="ＭＳ Ｐゴシック" charset="0"/>
-              </a:rPr>
-              <a:t>問題</a:t>
-            </a:r>
-            <a:r>
-              <a:rPr lang="en-US" altLang="ja-JP" dirty="0" smtClean="0">
+              <a:t>練習問題</a:t>
+            </a:r>
+            <a:r>
+              <a:rPr lang="en-US" altLang="ja-JP" dirty="0">
                 <a:latin typeface="Arial" charset="0"/>
                 <a:ea typeface="ＭＳ Ｐゴシック" charset="0"/>
               </a:rPr>
@@ -7846,21 +7559,21 @@
               <a:buNone/>
             </a:pPr>
             <a:r>
-              <a:rPr lang="en-US" altLang="ja-JP" sz="2800" dirty="0" smtClean="0">
+              <a:rPr lang="en-US" altLang="ja-JP" sz="2800" dirty="0">
                 <a:latin typeface="Arial" charset="0"/>
                 <a:ea typeface="ＭＳ Ｐゴシック" charset="0"/>
               </a:rPr>
               <a:t>C</a:t>
             </a:r>
             <a:r>
-              <a:rPr lang="ja-JP" altLang="en-US" sz="2800" dirty="0" smtClean="0">
+              <a:rPr lang="ja-JP" altLang="en-US" sz="2800" dirty="0">
                 <a:latin typeface="Arial" charset="0"/>
                 <a:ea typeface="ＭＳ Ｐゴシック" charset="0"/>
               </a:rPr>
               <a:t>言語の変数宣言</a:t>
             </a:r>
             <a:r>
-              <a:rPr lang="en-US" altLang="ja-JP" sz="2800" dirty="0" smtClean="0">
+              <a:rPr lang="en-US" altLang="ja-JP" sz="2800" dirty="0">
                 <a:latin typeface="Arial" charset="0"/>
                 <a:ea typeface="ＭＳ Ｐゴシック" charset="0"/>
               </a:rPr>
@@ -7873,32 +7586,25 @@
               <a:buNone/>
             </a:pPr>
             <a:r>
-              <a:rPr lang="en-US" altLang="ja-JP" sz="2800" dirty="0" smtClean="0">
+              <a:rPr lang="en-US" altLang="ja-JP" sz="2800" dirty="0">
                 <a:latin typeface="Arial" charset="0"/>
                 <a:ea typeface="ＭＳ Ｐゴシック" charset="0"/>
               </a:rPr>
               <a:t>    </a:t>
             </a:r>
             <a:r>
-              <a:rPr lang="en-US" altLang="ja-JP" sz="2800" dirty="0" err="1" smtClean="0">
+              <a:rPr lang="en-US" altLang="ja-JP" sz="2800" dirty="0" err="1">
                 <a:latin typeface="Arial" charset="0"/>
                 <a:ea typeface="ＭＳ Ｐゴシック" charset="0"/>
               </a:rPr>
               <a:t>int</a:t>
             </a:r>
             <a:r>
-              <a:rPr lang="en-US" altLang="ja-JP" sz="2800" dirty="0" smtClean="0">
-                <a:latin typeface="Arial" charset="0"/>
-                <a:ea typeface="ＭＳ Ｐゴシック" charset="0"/>
-              </a:rPr>
-              <a:t>  </a:t>
-            </a:r>
-            <a:r>
               <a:rPr lang="en-US" altLang="ja-JP" sz="2800" dirty="0">
                 <a:latin typeface="Arial" charset="0"/>
                 <a:ea typeface="ＭＳ Ｐゴシック" charset="0"/>
               </a:rPr>
-              <a:t>b [2] [13] ;</a:t>
+              <a:t>  b [2] [13] ;</a:t>
             </a:r>
           </a:p>
           <a:p>
@@ -7907,25 +7613,11 @@
               <a:buNone/>
             </a:pPr>
             <a:r>
-              <a:rPr lang="ja-JP" altLang="en-US" sz="2800" dirty="0" smtClean="0">
-                <a:latin typeface="Arial" charset="0"/>
-                <a:ea typeface="ＭＳ Ｐゴシック" charset="0"/>
-              </a:rPr>
-              <a:t>のもと</a:t>
-            </a:r>
-            <a:r>
               <a:rPr lang="ja-JP" altLang="en-US" sz="2800" dirty="0">
                 <a:latin typeface="Arial" charset="0"/>
                 <a:ea typeface="ＭＳ Ｐゴシック" charset="0"/>
               </a:rPr>
-              <a:t>で</a:t>
-            </a:r>
-            <a:r>
-              <a:rPr lang="ja-JP" altLang="en-US" sz="2800" dirty="0" smtClean="0">
-                <a:latin typeface="Arial" charset="0"/>
-                <a:ea typeface="ＭＳ Ｐゴシック" charset="0"/>
-              </a:rPr>
-              <a:t>、式  </a:t>
+              <a:t>のもとで、式  </a:t>
             </a:r>
             <a:r>
               <a:rPr lang="en-US" altLang="ja-JP" sz="2800" dirty="0">
@@ -7939,42 +7631,21 @@
                 <a:latin typeface="Arial" charset="0"/>
                 <a:ea typeface="ＭＳ Ｐゴシック" charset="0"/>
               </a:rPr>
-              <a:t>の</a:t>
-            </a:r>
-            <a:r>
-              <a:rPr lang="ja-JP" altLang="en-US" sz="2800" dirty="0" smtClean="0">
-                <a:latin typeface="Arial" charset="0"/>
-                <a:ea typeface="ＭＳ Ｐゴシック" charset="0"/>
-              </a:rPr>
-              <a:t>型を、変数</a:t>
-            </a:r>
-            <a:r>
-              <a:rPr lang="en-US" altLang="ja-JP" sz="2800" dirty="0" smtClean="0">
+              <a:t>の型を、変数</a:t>
+            </a:r>
+            <a:r>
+              <a:rPr lang="en-US" altLang="ja-JP" sz="2800" dirty="0">
                 <a:latin typeface="Arial" charset="0"/>
                 <a:ea typeface="ＭＳ Ｐゴシック" charset="0"/>
               </a:rPr>
               <a:t>b</a:t>
             </a:r>
             <a:r>
-              <a:rPr lang="ja-JP" altLang="en-US" sz="2800" dirty="0" smtClean="0">
-                <a:latin typeface="Arial" charset="0"/>
-                <a:ea typeface="ＭＳ Ｐゴシック" charset="0"/>
-              </a:rPr>
-              <a:t>の型の後置記法による宣言</a:t>
-            </a:r>
-            <a:r>
               <a:rPr lang="ja-JP" altLang="en-US" sz="2800" dirty="0">
                 <a:latin typeface="Arial" charset="0"/>
                 <a:ea typeface="ＭＳ Ｐゴシック" charset="0"/>
               </a:rPr>
-              <a:t>から推論規則で</a:t>
-            </a:r>
-            <a:r>
-              <a:rPr lang="ja-JP" altLang="en-US" sz="2800" dirty="0" smtClean="0">
-                <a:latin typeface="Arial" charset="0"/>
-                <a:ea typeface="ＭＳ Ｐゴシック" charset="0"/>
-              </a:rPr>
-              <a:t>導け。</a:t>
+              <a:t>の型の後置記法による宣言から推論規則で導け。</a:t>
             </a:r>
             <a:endParaRPr lang="en-US" altLang="ja-JP" sz="2800" dirty="0">
               <a:latin typeface="Arial" charset="0"/>
@@ -8033,17 +7704,10 @@
                 <a:latin typeface="Arial" charset="0"/>
                 <a:ea typeface="ＭＳ Ｐゴシック" charset="0"/>
               </a:rPr>
-              <a:t>練習</a:t>
-            </a:r>
-            <a:r>
-              <a:rPr lang="ja-JP" altLang="en-US" dirty="0" smtClean="0">
-                <a:latin typeface="Arial" charset="0"/>
-                <a:ea typeface="ＭＳ Ｐゴシック" charset="0"/>
-              </a:rPr>
-              <a:t>問題</a:t>
-            </a:r>
-            <a:r>
-              <a:rPr lang="en-US" altLang="ja-JP" dirty="0" smtClean="0">
+              <a:t>練習問題</a:t>
+            </a:r>
+            <a:r>
+              <a:rPr lang="en-US" altLang="ja-JP" dirty="0">
                 <a:latin typeface="Arial" charset="0"/>
                 <a:ea typeface="ＭＳ Ｐゴシック" charset="0"/>
               </a:rPr>
@@ -8081,20 +7745,20 @@
               <a:buNone/>
             </a:pPr>
             <a:r>
-              <a:rPr lang="en-US" altLang="ja-JP" sz="2800" dirty="0" smtClean="0">
+              <a:rPr lang="en-US" altLang="ja-JP" sz="2800" dirty="0">
                 <a:latin typeface="Arial" charset="0"/>
                 <a:ea typeface="ＭＳ Ｐゴシック" charset="0"/>
               </a:rPr>
               <a:t>C</a:t>
             </a:r>
             <a:r>
-              <a:rPr lang="ja-JP" altLang="en-US" sz="2800" dirty="0" smtClean="0">
+              <a:rPr lang="ja-JP" altLang="en-US" sz="2800" dirty="0">
                 <a:latin typeface="Arial" charset="0"/>
                 <a:ea typeface="ＭＳ Ｐゴシック" charset="0"/>
               </a:rPr>
               <a:t>言語の変数宣言</a:t>
             </a:r>
-            <a:endParaRPr lang="en-US" altLang="ja-JP" sz="2800" dirty="0" smtClean="0">
+            <a:endParaRPr lang="en-US" altLang="ja-JP" sz="2800" dirty="0">
               <a:latin typeface="Arial" charset="0"/>
               <a:ea typeface="ＭＳ Ｐゴシック" charset="0"/>
             </a:endParaRPr>
@@ -8105,7 +7769,7 @@
               <a:buNone/>
             </a:pPr>
             <a:r>
-              <a:rPr lang="en-US" altLang="ja-JP" sz="2800" dirty="0" smtClean="0">
+              <a:rPr lang="en-US" altLang="ja-JP" sz="2800" dirty="0">
                 <a:latin typeface="Arial" charset="0"/>
                 <a:ea typeface="ＭＳ Ｐゴシック" charset="0"/>
               </a:rPr>
@@ -8132,25 +7796,11 @@
               <a:buNone/>
             </a:pPr>
             <a:r>
-              <a:rPr lang="ja-JP" altLang="en-US" sz="2800" dirty="0" smtClean="0">
-                <a:latin typeface="Arial" charset="0"/>
-                <a:ea typeface="ＭＳ Ｐゴシック" charset="0"/>
-              </a:rPr>
-              <a:t>のもと</a:t>
-            </a:r>
-            <a:r>
               <a:rPr lang="ja-JP" altLang="en-US" sz="2800" dirty="0">
                 <a:latin typeface="Arial" charset="0"/>
                 <a:ea typeface="ＭＳ Ｐゴシック" charset="0"/>
               </a:rPr>
-              <a:t>で</a:t>
-            </a:r>
-            <a:r>
-              <a:rPr lang="ja-JP" altLang="en-US" sz="2800" dirty="0" smtClean="0">
-                <a:latin typeface="Arial" charset="0"/>
-                <a:ea typeface="ＭＳ Ｐゴシック" charset="0"/>
-              </a:rPr>
-              <a:t>、式  </a:t>
+              <a:t>のもとで、式  </a:t>
             </a:r>
             <a:r>
               <a:rPr lang="en-US" altLang="ja-JP" sz="2800" dirty="0">
@@ -8164,42 +7814,21 @@
                 <a:latin typeface="Arial" charset="0"/>
                 <a:ea typeface="ＭＳ Ｐゴシック" charset="0"/>
               </a:rPr>
-              <a:t>の</a:t>
-            </a:r>
-            <a:r>
-              <a:rPr lang="ja-JP" altLang="en-US" sz="2800" dirty="0" smtClean="0">
-                <a:latin typeface="Arial" charset="0"/>
-                <a:ea typeface="ＭＳ Ｐゴシック" charset="0"/>
-              </a:rPr>
-              <a:t>型を、変数</a:t>
-            </a:r>
-            <a:r>
-              <a:rPr lang="en-US" altLang="ja-JP" sz="2800" dirty="0" smtClean="0">
+              <a:t>の型を、変数</a:t>
+            </a:r>
+            <a:r>
+              <a:rPr lang="en-US" altLang="ja-JP" sz="2800" dirty="0">
                 <a:latin typeface="Arial" charset="0"/>
                 <a:ea typeface="ＭＳ Ｐゴシック" charset="0"/>
               </a:rPr>
               <a:t>b</a:t>
             </a:r>
             <a:r>
-              <a:rPr lang="ja-JP" altLang="en-US" sz="2800" dirty="0" smtClean="0">
-                <a:latin typeface="Arial" charset="0"/>
-                <a:ea typeface="ＭＳ Ｐゴシック" charset="0"/>
-              </a:rPr>
-              <a:t>の型の後置記法による宣言</a:t>
-            </a:r>
-            <a:r>
               <a:rPr lang="ja-JP" altLang="en-US" sz="2800" dirty="0">
                 <a:latin typeface="Arial" charset="0"/>
                 <a:ea typeface="ＭＳ Ｐゴシック" charset="0"/>
               </a:rPr>
-              <a:t>から推論規則で導け</a:t>
-            </a:r>
-            <a:r>
-              <a:rPr lang="ja-JP" altLang="en-US" sz="2800" dirty="0" smtClean="0">
-                <a:latin typeface="Arial" charset="0"/>
-                <a:ea typeface="ＭＳ Ｐゴシック" charset="0"/>
-              </a:rPr>
-              <a:t>。</a:t>
+              <a:t>の型の後置記法による宣言から推論規則で導け。</a:t>
             </a:r>
             <a:endParaRPr lang="en-US" altLang="ja-JP" sz="2800" dirty="0">
               <a:latin typeface="Arial" charset="0"/>
@@ -8333,14 +7962,14 @@
           </a:ln>
           <a:extLst>
             <a:ext uri="{909E8E84-426E-40dd-AFC4-6F175D3DCCD1}">
-              <a14:hiddenFill xmlns:a14="http://schemas.microsoft.com/office/drawing/2010/main">
+              <a14:hiddenFill xmlns:a14="http://schemas.microsoft.com/office/drawing/2010/main" xmlns="">
                 <a:solidFill>
                   <a:srgbClr val="FFFFFF"/>
                 </a:solidFill>
               </a14:hiddenFill>
             </a:ext>
             <a:ext uri="{91240B29-F687-4f45-9708-019B960494DF}">
-              <a14:hiddenLine xmlns:a14="http://schemas.microsoft.com/office/drawing/2010/main" w="9525">
+              <a14:hiddenLine xmlns:a14="http://schemas.microsoft.com/office/drawing/2010/main" xmlns="" w="9525">
                 <a:solidFill>
                   <a:srgbClr val="000000"/>
                 </a:solidFill>
@@ -8545,7 +8174,7 @@
           </a:ln>
           <a:extLst>
             <a:ext uri="{909E8E84-426E-40dd-AFC4-6F175D3DCCD1}">
-              <a14:hiddenFill xmlns:a14="http://schemas.microsoft.com/office/drawing/2010/main">
+              <a14:hiddenFill xmlns:a14="http://schemas.microsoft.com/office/drawing/2010/main" xmlns="">
                 <a:noFill/>
               </a14:hiddenFill>
             </a:ext>
@@ -8698,7 +8327,7 @@
           </a:ln>
           <a:extLst>
             <a:ext uri="{909E8E84-426E-40dd-AFC4-6F175D3DCCD1}">
-              <a14:hiddenFill xmlns:a14="http://schemas.microsoft.com/office/drawing/2010/main">
+              <a14:hiddenFill xmlns:a14="http://schemas.microsoft.com/office/drawing/2010/main" xmlns="">
                 <a:solidFill>
                   <a:srgbClr val="FFFFFF"/>
                 </a:solidFill>
@@ -8873,7 +8502,7 @@
           <a:lstStyle/>
           <a:p>
             <a:r>
-              <a:rPr lang="ja-JP" altLang="en-US" dirty="0" smtClean="0"/>
+              <a:rPr lang="ja-JP" altLang="en-US" dirty="0"/>
               <a:t>型付き言語</a:t>
             </a:r>
             <a:endParaRPr kumimoji="1" lang="ja-JP" altLang="en-US" dirty="0"/>
@@ -8901,76 +8530,76 @@
           <a:lstStyle/>
           <a:p>
             <a:r>
-              <a:rPr lang="ja-JP" altLang="en-US" dirty="0" smtClean="0"/>
+              <a:rPr lang="ja-JP" altLang="en-US" dirty="0"/>
               <a:t>静的型付き言語</a:t>
             </a:r>
             <a:r>
-              <a:rPr lang="en-US" altLang="ja-JP" dirty="0" smtClean="0"/>
+              <a:rPr lang="en-US" altLang="ja-JP" dirty="0"/>
               <a:t>(statically typed language)</a:t>
             </a:r>
           </a:p>
           <a:p>
             <a:pPr lvl="1"/>
             <a:r>
-              <a:rPr lang="ja-JP" altLang="en-US" dirty="0" smtClean="0"/>
+              <a:rPr lang="ja-JP" altLang="en-US" dirty="0"/>
               <a:t>コンパイル時に型の整合性を検査する</a:t>
             </a:r>
-            <a:endParaRPr lang="en-US" altLang="ja-JP" dirty="0" smtClean="0"/>
+            <a:endParaRPr lang="en-US" altLang="ja-JP" dirty="0"/>
           </a:p>
           <a:p>
             <a:pPr lvl="1"/>
             <a:r>
-              <a:rPr lang="ja-JP" altLang="en-US" dirty="0" smtClean="0"/>
+              <a:rPr lang="ja-JP" altLang="en-US" dirty="0"/>
               <a:t>（例）</a:t>
             </a:r>
             <a:r>
-              <a:rPr lang="en-US" altLang="ja-JP" dirty="0" smtClean="0"/>
+              <a:rPr lang="en-US" altLang="ja-JP" dirty="0"/>
               <a:t>C, Java, Pascal</a:t>
             </a:r>
             <a:r>
-              <a:rPr lang="ja-JP" altLang="en-US" dirty="0" smtClean="0"/>
+              <a:rPr lang="ja-JP" altLang="en-US" dirty="0"/>
               <a:t>など</a:t>
             </a:r>
-            <a:endParaRPr lang="en-US" altLang="ja-JP" dirty="0" smtClean="0"/>
-          </a:p>
-          <a:p>
-            <a:r>
-              <a:rPr kumimoji="1" lang="ja-JP" altLang="en-US" dirty="0" smtClean="0"/>
+            <a:endParaRPr lang="en-US" altLang="ja-JP" dirty="0"/>
+          </a:p>
+          <a:p>
+            <a:r>
+              <a:rPr kumimoji="1" lang="ja-JP" altLang="en-US" dirty="0"/>
               <a:t>動的型付き言語</a:t>
             </a:r>
             <a:r>
-              <a:rPr kumimoji="1" lang="en-US" altLang="ja-JP" dirty="0" smtClean="0"/>
+              <a:rPr kumimoji="1" lang="en-US" altLang="ja-JP" dirty="0"/>
               <a:t>(dynamically typed language)</a:t>
             </a:r>
           </a:p>
           <a:p>
             <a:pPr lvl="1"/>
             <a:r>
-              <a:rPr lang="ja-JP" altLang="en-US" dirty="0" smtClean="0"/>
+              <a:rPr lang="ja-JP" altLang="en-US" dirty="0"/>
               <a:t>実行時に型の整合性を検査する</a:t>
             </a:r>
-            <a:endParaRPr kumimoji="1" lang="en-US" altLang="ja-JP" dirty="0" smtClean="0"/>
+            <a:endParaRPr kumimoji="1" lang="en-US" altLang="ja-JP" dirty="0"/>
           </a:p>
           <a:p>
             <a:pPr lvl="1"/>
             <a:r>
-              <a:rPr lang="ja-JP" altLang="en-US" dirty="0" smtClean="0"/>
+              <a:rPr lang="ja-JP" altLang="en-US" dirty="0"/>
               <a:t>（例）</a:t>
             </a:r>
             <a:r>
-              <a:rPr lang="en-US" altLang="ja-JP" dirty="0" smtClean="0"/>
+              <a:rPr lang="en-US" altLang="ja-JP" dirty="0"/>
               <a:t>Lisp, </a:t>
             </a:r>
             <a:r>
-              <a:rPr lang="en-US" altLang="ja-JP" dirty="0" err="1" smtClean="0"/>
+              <a:rPr lang="en-US" altLang="ja-JP" dirty="0" err="1"/>
               <a:t>Emacs</a:t>
             </a:r>
             <a:r>
-              <a:rPr lang="en-US" altLang="ja-JP" dirty="0" smtClean="0"/>
+              <a:rPr lang="en-US" altLang="ja-JP" dirty="0"/>
               <a:t> Lisp, Scheme</a:t>
             </a:r>
             <a:r>
-              <a:rPr lang="ja-JP" altLang="en-US" dirty="0" smtClean="0"/>
+              <a:rPr lang="ja-JP" altLang="en-US" dirty="0"/>
               <a:t>など</a:t>
             </a:r>
             <a:endParaRPr kumimoji="1" lang="ja-JP" altLang="en-US" dirty="0"/>
@@ -9094,14 +8723,7 @@
                 <a:latin typeface="Arial" charset="0"/>
                 <a:ea typeface="ＭＳ Ｐゴシック" charset="0"/>
               </a:rPr>
-              <a:t>について、以下の推論規則を</a:t>
-            </a:r>
-            <a:r>
-              <a:rPr lang="ja-JP" altLang="en-US" sz="2800" dirty="0" smtClean="0">
-                <a:latin typeface="Arial" charset="0"/>
-                <a:ea typeface="ＭＳ Ｐゴシック" charset="0"/>
-              </a:rPr>
-              <a:t>追加する。</a:t>
+              <a:t>について、以下の推論規則を追加する。</a:t>
             </a:r>
             <a:endParaRPr lang="en-US" altLang="ja-JP" sz="2800" dirty="0">
               <a:latin typeface="Arial" charset="0"/>
@@ -9132,14 +8754,14 @@
           </a:ln>
           <a:extLst>
             <a:ext uri="{909E8E84-426E-40dd-AFC4-6F175D3DCCD1}">
-              <a14:hiddenFill xmlns:a14="http://schemas.microsoft.com/office/drawing/2010/main">
+              <a14:hiddenFill xmlns:a14="http://schemas.microsoft.com/office/drawing/2010/main" xmlns="">
                 <a:solidFill>
                   <a:srgbClr val="FFFFFF"/>
                 </a:solidFill>
               </a14:hiddenFill>
             </a:ext>
             <a:ext uri="{91240B29-F687-4f45-9708-019B960494DF}">
-              <a14:hiddenLine xmlns:a14="http://schemas.microsoft.com/office/drawing/2010/main" w="9525">
+              <a14:hiddenLine xmlns:a14="http://schemas.microsoft.com/office/drawing/2010/main" xmlns="" w="9525">
                 <a:solidFill>
                   <a:srgbClr val="000000"/>
                 </a:solidFill>
@@ -9351,7 +8973,7 @@
           </a:ln>
           <a:extLst>
             <a:ext uri="{909E8E84-426E-40dd-AFC4-6F175D3DCCD1}">
-              <a14:hiddenFill xmlns:a14="http://schemas.microsoft.com/office/drawing/2010/main">
+              <a14:hiddenFill xmlns:a14="http://schemas.microsoft.com/office/drawing/2010/main" xmlns="">
                 <a:noFill/>
               </a14:hiddenFill>
             </a:ext>
@@ -9380,14 +9002,14 @@
           </a:ln>
           <a:extLst>
             <a:ext uri="{909E8E84-426E-40dd-AFC4-6F175D3DCCD1}">
-              <a14:hiddenFill xmlns:a14="http://schemas.microsoft.com/office/drawing/2010/main">
+              <a14:hiddenFill xmlns:a14="http://schemas.microsoft.com/office/drawing/2010/main" xmlns="">
                 <a:solidFill>
                   <a:srgbClr val="FFFFFF"/>
                 </a:solidFill>
               </a14:hiddenFill>
             </a:ext>
             <a:ext uri="{91240B29-F687-4f45-9708-019B960494DF}">
-              <a14:hiddenLine xmlns:a14="http://schemas.microsoft.com/office/drawing/2010/main" w="9525">
+              <a14:hiddenLine xmlns:a14="http://schemas.microsoft.com/office/drawing/2010/main" xmlns="" w="9525">
                 <a:solidFill>
                   <a:srgbClr val="000000"/>
                 </a:solidFill>
@@ -9521,21 +9143,16 @@
             </a:r>
             <a:r>
               <a:rPr lang="ja-JP" altLang="en-US" sz="2800" b="0" dirty="0"/>
-              <a:t>は左辺値を持つ式であり、かつ定数では</a:t>
-            </a:r>
-            <a:r>
-              <a:rPr lang="ja-JP" altLang="en-US" sz="2800" b="0" dirty="0" smtClean="0"/>
-              <a:t>ない（宣言に</a:t>
-            </a:r>
-            <a:r>
-              <a:rPr lang="en-US" altLang="ja-JP" sz="2800" b="0" dirty="0" err="1" smtClean="0"/>
+              <a:t>は左辺値を持つ式であり、かつ定数ではない（宣言に</a:t>
+            </a:r>
+            <a:r>
+              <a:rPr lang="en-US" altLang="ja-JP" sz="2800" b="0" dirty="0" err="1"/>
               <a:t>const</a:t>
             </a:r>
             <a:r>
-              <a:rPr lang="ja-JP" altLang="en-US" sz="2800" b="0" dirty="0" smtClean="0"/>
+              <a:rPr lang="ja-JP" altLang="en-US" sz="2800" b="0" dirty="0"/>
               <a:t>修飾子がついている変数ではない）。</a:t>
             </a:r>
-            <a:endParaRPr lang="ja-JP" altLang="en-US" sz="2800" b="0" dirty="0"/>
           </a:p>
         </p:txBody>
       </p:sp>
@@ -9651,14 +9268,7 @@
                 <a:latin typeface="Arial" charset="0"/>
                 <a:ea typeface="ＭＳ Ｐゴシック" charset="0"/>
               </a:rPr>
-              <a:t>について以下の推論規則を</a:t>
-            </a:r>
-            <a:r>
-              <a:rPr lang="ja-JP" altLang="en-US" sz="2800" dirty="0" smtClean="0">
-                <a:latin typeface="Arial" charset="0"/>
-                <a:ea typeface="ＭＳ Ｐゴシック" charset="0"/>
-              </a:rPr>
-              <a:t>追加する。</a:t>
+              <a:t>について以下の推論規則を追加する。</a:t>
             </a:r>
             <a:endParaRPr lang="en-US" altLang="ja-JP" sz="2800" dirty="0">
               <a:latin typeface="Arial" charset="0"/>
@@ -9760,14 +9370,14 @@
           </a:ln>
           <a:extLst>
             <a:ext uri="{909E8E84-426E-40dd-AFC4-6F175D3DCCD1}">
-              <a14:hiddenFill xmlns:a14="http://schemas.microsoft.com/office/drawing/2010/main">
+              <a14:hiddenFill xmlns:a14="http://schemas.microsoft.com/office/drawing/2010/main" xmlns="">
                 <a:solidFill>
                   <a:srgbClr val="FFFFFF"/>
                 </a:solidFill>
               </a14:hiddenFill>
             </a:ext>
             <a:ext uri="{91240B29-F687-4f45-9708-019B960494DF}">
-              <a14:hiddenLine xmlns:a14="http://schemas.microsoft.com/office/drawing/2010/main" w="9525">
+              <a14:hiddenLine xmlns:a14="http://schemas.microsoft.com/office/drawing/2010/main" xmlns="" w="9525">
                 <a:solidFill>
                   <a:srgbClr val="000000"/>
                 </a:solidFill>
@@ -9974,7 +9584,7 @@
           </a:ln>
           <a:extLst>
             <a:ext uri="{909E8E84-426E-40dd-AFC4-6F175D3DCCD1}">
-              <a14:hiddenFill xmlns:a14="http://schemas.microsoft.com/office/drawing/2010/main">
+              <a14:hiddenFill xmlns:a14="http://schemas.microsoft.com/office/drawing/2010/main" xmlns="">
                 <a:noFill/>
               </a14:hiddenFill>
             </a:ext>
@@ -10003,14 +9613,14 @@
           </a:ln>
           <a:extLst>
             <a:ext uri="{909E8E84-426E-40dd-AFC4-6F175D3DCCD1}">
-              <a14:hiddenFill xmlns:a14="http://schemas.microsoft.com/office/drawing/2010/main">
+              <a14:hiddenFill xmlns:a14="http://schemas.microsoft.com/office/drawing/2010/main" xmlns="">
                 <a:solidFill>
                   <a:srgbClr val="FFFFFF"/>
                 </a:solidFill>
               </a14:hiddenFill>
             </a:ext>
             <a:ext uri="{91240B29-F687-4f45-9708-019B960494DF}">
-              <a14:hiddenLine xmlns:a14="http://schemas.microsoft.com/office/drawing/2010/main" w="9525">
+              <a14:hiddenLine xmlns:a14="http://schemas.microsoft.com/office/drawing/2010/main" xmlns="" w="9525">
                 <a:solidFill>
                   <a:srgbClr val="000000"/>
                 </a:solidFill>
@@ -10209,7 +9819,7 @@
           </a:ln>
           <a:extLst>
             <a:ext uri="{909E8E84-426E-40dd-AFC4-6F175D3DCCD1}">
-              <a14:hiddenFill xmlns:a14="http://schemas.microsoft.com/office/drawing/2010/main">
+              <a14:hiddenFill xmlns:a14="http://schemas.microsoft.com/office/drawing/2010/main" xmlns="">
                 <a:noFill/>
               </a14:hiddenFill>
             </a:ext>
@@ -10238,14 +9848,14 @@
           </a:ln>
           <a:extLst>
             <a:ext uri="{909E8E84-426E-40dd-AFC4-6F175D3DCCD1}">
-              <a14:hiddenFill xmlns:a14="http://schemas.microsoft.com/office/drawing/2010/main">
+              <a14:hiddenFill xmlns:a14="http://schemas.microsoft.com/office/drawing/2010/main" xmlns="">
                 <a:solidFill>
                   <a:srgbClr val="FFFFFF"/>
                 </a:solidFill>
               </a14:hiddenFill>
             </a:ext>
             <a:ext uri="{91240B29-F687-4f45-9708-019B960494DF}">
-              <a14:hiddenLine xmlns:a14="http://schemas.microsoft.com/office/drawing/2010/main" w="9525">
+              <a14:hiddenLine xmlns:a14="http://schemas.microsoft.com/office/drawing/2010/main" xmlns="" w="9525">
                 <a:solidFill>
                   <a:srgbClr val="000000"/>
                 </a:solidFill>
@@ -10462,7 +10072,7 @@
           </a:ln>
           <a:extLst>
             <a:ext uri="{909E8E84-426E-40dd-AFC4-6F175D3DCCD1}">
-              <a14:hiddenFill xmlns:a14="http://schemas.microsoft.com/office/drawing/2010/main">
+              <a14:hiddenFill xmlns:a14="http://schemas.microsoft.com/office/drawing/2010/main" xmlns="">
                 <a:noFill/>
               </a14:hiddenFill>
             </a:ext>
@@ -10549,21 +10159,21 @@
               <a:buNone/>
             </a:pPr>
             <a:r>
-              <a:rPr lang="en-US" altLang="ja-JP" sz="2800" dirty="0" smtClean="0">
+              <a:rPr lang="en-US" altLang="ja-JP" sz="2800" dirty="0">
                 <a:latin typeface="Arial" charset="0"/>
                 <a:ea typeface="ＭＳ Ｐゴシック" charset="0"/>
               </a:rPr>
               <a:t>C</a:t>
             </a:r>
             <a:r>
-              <a:rPr lang="ja-JP" altLang="en-US" sz="2800" dirty="0" smtClean="0">
+              <a:rPr lang="ja-JP" altLang="en-US" sz="2800" dirty="0">
                 <a:latin typeface="Arial" charset="0"/>
                 <a:ea typeface="ＭＳ Ｐゴシック" charset="0"/>
               </a:rPr>
               <a:t>言語の変数宣言</a:t>
             </a:r>
             <a:r>
-              <a:rPr lang="en-US" altLang="ja-JP" sz="2800" dirty="0" smtClean="0">
+              <a:rPr lang="en-US" altLang="ja-JP" sz="2800" dirty="0">
                 <a:latin typeface="Arial" charset="0"/>
                 <a:ea typeface="ＭＳ Ｐゴシック" charset="0"/>
               </a:rPr>
@@ -10576,18 +10186,11 @@
               <a:buNone/>
             </a:pPr>
             <a:r>
-              <a:rPr lang="en-US" altLang="ja-JP" sz="2800" dirty="0" smtClean="0">
-                <a:latin typeface="Arial" charset="0"/>
-                <a:ea typeface="ＭＳ Ｐゴシック" charset="0"/>
-              </a:rPr>
-              <a:t>    a </a:t>
-            </a:r>
-            <a:r>
               <a:rPr lang="en-US" altLang="ja-JP" sz="2800" dirty="0">
                 <a:latin typeface="Arial" charset="0"/>
                 <a:ea typeface="ＭＳ Ｐゴシック" charset="0"/>
               </a:rPr>
-              <a:t>: </a:t>
+              <a:t>    a : </a:t>
             </a:r>
             <a:r>
               <a:rPr lang="en-US" altLang="ja-JP" sz="2800" dirty="0" err="1">
@@ -10614,21 +10217,7 @@
                 <a:latin typeface="Arial" charset="0"/>
                 <a:ea typeface="ＭＳ Ｐゴシック" charset="0"/>
               </a:rPr>
-              <a:t> </a:t>
-            </a:r>
-            <a:r>
-              <a:rPr lang="en-US" altLang="ja-JP" sz="2800" dirty="0" smtClean="0">
-                <a:latin typeface="Arial" charset="0"/>
-                <a:ea typeface="ＭＳ Ｐゴシック" charset="0"/>
-              </a:rPr>
-              <a:t>   b </a:t>
-            </a:r>
-            <a:r>
-              <a:rPr lang="en-US" altLang="ja-JP" sz="2800" dirty="0">
-                <a:latin typeface="Arial" charset="0"/>
-                <a:ea typeface="ＭＳ Ｐゴシック" charset="0"/>
-              </a:rPr>
-              <a:t>: </a:t>
+              <a:t>    b : </a:t>
             </a:r>
             <a:r>
               <a:rPr lang="en-US" altLang="ja-JP" sz="2800" dirty="0" err="1">
@@ -10651,53 +10240,25 @@
               <a:buNone/>
             </a:pPr>
             <a:r>
-              <a:rPr lang="ja-JP" altLang="en-US" sz="2800" dirty="0" smtClean="0">
+              <a:rPr lang="ja-JP" altLang="en-US" sz="2800" dirty="0">
                 <a:latin typeface="Arial" charset="0"/>
                 <a:ea typeface="ＭＳ Ｐゴシック" charset="0"/>
               </a:rPr>
               <a:t>のもとで、代入式</a:t>
             </a:r>
             <a:r>
-              <a:rPr lang="en-US" altLang="ja-JP" sz="2800" dirty="0" smtClean="0">
-                <a:latin typeface="Arial" charset="0"/>
-                <a:ea typeface="ＭＳ Ｐゴシック" charset="0"/>
-              </a:rPr>
-              <a:t> a </a:t>
-            </a:r>
-            <a:r>
               <a:rPr lang="en-US" altLang="ja-JP" sz="2800" dirty="0">
                 <a:latin typeface="Arial" charset="0"/>
                 <a:ea typeface="ＭＳ Ｐゴシック" charset="0"/>
               </a:rPr>
-              <a:t>= </a:t>
-            </a:r>
-            <a:r>
-              <a:rPr lang="en-US" altLang="ja-JP" sz="2800" dirty="0" smtClean="0">
-                <a:latin typeface="Arial" charset="0"/>
-                <a:ea typeface="ＭＳ Ｐゴシック" charset="0"/>
-              </a:rPr>
-              <a:t>b </a:t>
-            </a:r>
-            <a:r>
-              <a:rPr lang="ja-JP" altLang="en-US" sz="2800" dirty="0" smtClean="0">
-                <a:latin typeface="Arial" charset="0"/>
-                <a:ea typeface="ＭＳ Ｐゴシック" charset="0"/>
-              </a:rPr>
-              <a:t>が</a:t>
+              <a:t> a = b </a:t>
             </a:r>
             <a:r>
               <a:rPr lang="ja-JP" altLang="en-US" sz="2800" dirty="0">
                 <a:latin typeface="Arial" charset="0"/>
                 <a:ea typeface="ＭＳ Ｐゴシック" charset="0"/>
               </a:rPr>
-              <a:t>型について整合性があること</a:t>
-            </a:r>
-            <a:r>
-              <a:rPr lang="ja-JP" altLang="en-US" sz="2800" dirty="0" smtClean="0">
-                <a:latin typeface="Arial" charset="0"/>
-                <a:ea typeface="ＭＳ Ｐゴシック" charset="0"/>
-              </a:rPr>
-              <a:t>を以下のようにして確認できる。</a:t>
+              <a:t>が型について整合性があることを以下のようにして確認できる。</a:t>
             </a:r>
             <a:endParaRPr lang="en-US" altLang="ja-JP" sz="2800" dirty="0">
               <a:latin typeface="Arial" charset="0"/>
@@ -10728,14 +10289,14 @@
           </a:ln>
           <a:extLst>
             <a:ext uri="{909E8E84-426E-40dd-AFC4-6F175D3DCCD1}">
-              <a14:hiddenFill xmlns:a14="http://schemas.microsoft.com/office/drawing/2010/main">
+              <a14:hiddenFill xmlns:a14="http://schemas.microsoft.com/office/drawing/2010/main" xmlns="">
                 <a:solidFill>
                   <a:srgbClr val="FFFFFF"/>
                 </a:solidFill>
               </a14:hiddenFill>
             </a:ext>
             <a:ext uri="{91240B29-F687-4f45-9708-019B960494DF}">
-              <a14:hiddenLine xmlns:a14="http://schemas.microsoft.com/office/drawing/2010/main" w="9525">
+              <a14:hiddenLine xmlns:a14="http://schemas.microsoft.com/office/drawing/2010/main" xmlns="" w="9525">
                 <a:solidFill>
                   <a:srgbClr val="000000"/>
                 </a:solidFill>
@@ -10895,14 +10456,14 @@
           </a:ln>
           <a:extLst>
             <a:ext uri="{909E8E84-426E-40dd-AFC4-6F175D3DCCD1}">
-              <a14:hiddenFill xmlns:a14="http://schemas.microsoft.com/office/drawing/2010/main">
+              <a14:hiddenFill xmlns:a14="http://schemas.microsoft.com/office/drawing/2010/main" xmlns="">
                 <a:solidFill>
                   <a:srgbClr val="FFFFFF"/>
                 </a:solidFill>
               </a14:hiddenFill>
             </a:ext>
             <a:ext uri="{91240B29-F687-4f45-9708-019B960494DF}">
-              <a14:hiddenLine xmlns:a14="http://schemas.microsoft.com/office/drawing/2010/main" w="9525">
+              <a14:hiddenLine xmlns:a14="http://schemas.microsoft.com/office/drawing/2010/main" xmlns="" w="9525">
                 <a:solidFill>
                   <a:srgbClr val="000000"/>
                 </a:solidFill>
@@ -11056,14 +10617,14 @@
           </a:ln>
           <a:extLst>
             <a:ext uri="{909E8E84-426E-40dd-AFC4-6F175D3DCCD1}">
-              <a14:hiddenFill xmlns:a14="http://schemas.microsoft.com/office/drawing/2010/main">
+              <a14:hiddenFill xmlns:a14="http://schemas.microsoft.com/office/drawing/2010/main" xmlns="">
                 <a:solidFill>
                   <a:srgbClr val="FFFFFF"/>
                 </a:solidFill>
               </a14:hiddenFill>
             </a:ext>
             <a:ext uri="{91240B29-F687-4f45-9708-019B960494DF}">
-              <a14:hiddenLine xmlns:a14="http://schemas.microsoft.com/office/drawing/2010/main" w="9525">
+              <a14:hiddenLine xmlns:a14="http://schemas.microsoft.com/office/drawing/2010/main" xmlns="" w="9525">
                 <a:solidFill>
                   <a:srgbClr val="000000"/>
                 </a:solidFill>
@@ -11224,7 +10785,7 @@
           </a:ln>
           <a:extLst>
             <a:ext uri="{909E8E84-426E-40dd-AFC4-6F175D3DCCD1}">
-              <a14:hiddenFill xmlns:a14="http://schemas.microsoft.com/office/drawing/2010/main">
+              <a14:hiddenFill xmlns:a14="http://schemas.microsoft.com/office/drawing/2010/main" xmlns="">
                 <a:noFill/>
               </a14:hiddenFill>
             </a:ext>
@@ -11258,7 +10819,7 @@
           </a:ln>
           <a:extLst>
             <a:ext uri="{909E8E84-426E-40dd-AFC4-6F175D3DCCD1}">
-              <a14:hiddenFill xmlns:a14="http://schemas.microsoft.com/office/drawing/2010/main">
+              <a14:hiddenFill xmlns:a14="http://schemas.microsoft.com/office/drawing/2010/main" xmlns="">
                 <a:noFill/>
               </a14:hiddenFill>
             </a:ext>
@@ -11349,14 +10910,7 @@
                 <a:latin typeface="Arial" charset="0"/>
                 <a:ea typeface="ＭＳ Ｐゴシック" charset="0"/>
               </a:rPr>
-              <a:t>実際</a:t>
-            </a:r>
-            <a:r>
-              <a:rPr lang="ja-JP" altLang="en-US" sz="2800" dirty="0" smtClean="0">
-                <a:latin typeface="Arial" charset="0"/>
-                <a:ea typeface="ＭＳ Ｐゴシック" charset="0"/>
-              </a:rPr>
-              <a:t>の</a:t>
+              <a:t>実際の</a:t>
             </a:r>
             <a:r>
               <a:rPr lang="en-US" altLang="ja-JP" sz="2800" dirty="0">
@@ -11366,25 +10920,11 @@
               <a:t>C</a:t>
             </a:r>
             <a:r>
-              <a:rPr lang="ja-JP" altLang="en-US" sz="2800" dirty="0" smtClean="0">
-                <a:latin typeface="Arial" charset="0"/>
-                <a:ea typeface="ＭＳ Ｐゴシック" charset="0"/>
-              </a:rPr>
-              <a:t>言語</a:t>
-            </a:r>
-            <a:r>
               <a:rPr lang="ja-JP" altLang="en-US" sz="2800" dirty="0">
                 <a:latin typeface="Arial" charset="0"/>
                 <a:ea typeface="ＭＳ Ｐゴシック" charset="0"/>
               </a:rPr>
-              <a:t>では、関数に引数がある。その他、構造体、共用体など、今回扱っていない構文がある</a:t>
-            </a:r>
-            <a:r>
-              <a:rPr lang="ja-JP" altLang="en-US" sz="2800" dirty="0" smtClean="0">
-                <a:latin typeface="Arial" charset="0"/>
-                <a:ea typeface="ＭＳ Ｐゴシック" charset="0"/>
-              </a:rPr>
-              <a:t>。</a:t>
+              <a:t>言語では、関数に引数がある。その他、構造体、共用体など、今回扱っていない構文がある。</a:t>
             </a:r>
             <a:endParaRPr lang="en-US" altLang="ja-JP" sz="2800" dirty="0">
               <a:latin typeface="Arial" charset="0"/>
@@ -11404,18 +10944,11 @@
               <a:t>C</a:t>
             </a:r>
             <a:r>
-              <a:rPr lang="ja-JP" altLang="en-US" sz="2800" dirty="0" smtClean="0">
-                <a:latin typeface="Arial" charset="0"/>
-                <a:ea typeface="ＭＳ Ｐゴシック" charset="0"/>
-              </a:rPr>
-              <a:t>言語</a:t>
-            </a:r>
-            <a:r>
               <a:rPr lang="ja-JP" altLang="en-US" sz="2800" dirty="0">
                 <a:latin typeface="Arial" charset="0"/>
                 <a:ea typeface="ＭＳ Ｐゴシック" charset="0"/>
               </a:rPr>
-              <a:t>では共用体の型はチェックしない。中にどの型のデータが入っているかはプログラマが認識していなければならない。</a:t>
+              <a:t>言語では共用体の型はチェックしない。中にどの型のデータが入っているかはプログラマが認識していなければならない。</a:t>
             </a:r>
             <a:endParaRPr lang="en-US" altLang="ja-JP" sz="2800" dirty="0">
               <a:latin typeface="Arial" charset="0"/>
@@ -11429,13 +10962,6 @@
   <p:clrMapOvr>
     <a:masterClrMapping/>
   </p:clrMapOvr>
-  <p:timing>
-    <p:tnLst>
-      <p:par>
-        <p:cTn xmlns:p14="http://schemas.microsoft.com/office/powerpoint/2010/main" id="1" dur="indefinite" restart="never" nodeType="tmRoot"/>
-      </p:par>
-    </p:tnLst>
-  </p:timing>
 </p:sld>
 </file>
 
@@ -11481,17 +11007,10 @@
                 <a:latin typeface="Arial" charset="0"/>
                 <a:ea typeface="ＭＳ Ｐゴシック" charset="0"/>
               </a:rPr>
-              <a:t>練習</a:t>
-            </a:r>
-            <a:r>
-              <a:rPr lang="ja-JP" altLang="en-US" dirty="0" smtClean="0">
-                <a:latin typeface="Arial" charset="0"/>
-                <a:ea typeface="ＭＳ Ｐゴシック" charset="0"/>
-              </a:rPr>
-              <a:t>問題</a:t>
-            </a:r>
-            <a:r>
-              <a:rPr lang="en-US" altLang="ja-JP" dirty="0" smtClean="0">
+              <a:t>練習問題</a:t>
+            </a:r>
+            <a:r>
+              <a:rPr lang="en-US" altLang="ja-JP" dirty="0">
                 <a:latin typeface="Arial" charset="0"/>
                 <a:ea typeface="ＭＳ Ｐゴシック" charset="0"/>
               </a:rPr>
@@ -11529,20 +11048,20 @@
               <a:buNone/>
             </a:pPr>
             <a:r>
-              <a:rPr lang="en-US" altLang="ja-JP" sz="2800" dirty="0" smtClean="0">
+              <a:rPr lang="en-US" altLang="ja-JP" sz="2800" dirty="0">
                 <a:latin typeface="Arial" charset="0"/>
                 <a:ea typeface="ＭＳ Ｐゴシック" charset="0"/>
               </a:rPr>
               <a:t>C</a:t>
             </a:r>
             <a:r>
-              <a:rPr lang="ja-JP" altLang="en-US" sz="2800" dirty="0" smtClean="0">
+              <a:rPr lang="ja-JP" altLang="en-US" sz="2800" dirty="0">
                 <a:latin typeface="Arial" charset="0"/>
                 <a:ea typeface="ＭＳ Ｐゴシック" charset="0"/>
               </a:rPr>
               <a:t>言語の変数宣言</a:t>
             </a:r>
-            <a:endParaRPr lang="en-US" altLang="ja-JP" sz="2800" dirty="0" smtClean="0">
+            <a:endParaRPr lang="en-US" altLang="ja-JP" sz="2800" dirty="0">
               <a:latin typeface="Arial" charset="0"/>
               <a:ea typeface="ＭＳ Ｐゴシック" charset="0"/>
             </a:endParaRPr>
@@ -11553,18 +11072,11 @@
               <a:buNone/>
             </a:pPr>
             <a:r>
-              <a:rPr lang="en-US" altLang="ja-JP" sz="2800" dirty="0" smtClean="0">
-                <a:latin typeface="Arial" charset="0"/>
-                <a:ea typeface="ＭＳ Ｐゴシック" charset="0"/>
-              </a:rPr>
-              <a:t>   </a:t>
-            </a:r>
-            <a:r>
               <a:rPr lang="en-US" altLang="ja-JP" sz="2800" dirty="0">
                 <a:latin typeface="Arial" charset="0"/>
                 <a:ea typeface="ＭＳ Ｐゴシック" charset="0"/>
               </a:rPr>
-              <a:t>p : </a:t>
+              <a:t>   p : </a:t>
             </a:r>
             <a:r>
               <a:rPr lang="en-US" altLang="ja-JP" sz="2800" dirty="0" err="1">
@@ -11605,14 +11117,7 @@
                 <a:latin typeface="Arial" charset="0"/>
                 <a:ea typeface="ＭＳ Ｐゴシック" charset="0"/>
               </a:rPr>
-              <a:t> [10</a:t>
-            </a:r>
-            <a:r>
-              <a:rPr lang="en-US" altLang="ja-JP" sz="2800" dirty="0" smtClean="0">
-                <a:latin typeface="Arial" charset="0"/>
-                <a:ea typeface="ＭＳ Ｐゴシック" charset="0"/>
-              </a:rPr>
-              <a:t>]</a:t>
+              <a:t> [10]</a:t>
             </a:r>
           </a:p>
           <a:p>
@@ -11621,7 +11126,7 @@
               <a:buNone/>
             </a:pPr>
             <a:r>
-              <a:rPr lang="ja-JP" altLang="en-US" sz="2800" dirty="0" smtClean="0">
+              <a:rPr lang="ja-JP" altLang="en-US" sz="2800" dirty="0">
                 <a:latin typeface="Arial" charset="0"/>
                 <a:ea typeface="ＭＳ Ｐゴシック" charset="0"/>
               </a:rPr>
@@ -11869,14 +11374,14 @@
           </a:ln>
           <a:extLst>
             <a:ext uri="{909E8E84-426E-40dd-AFC4-6F175D3DCCD1}">
-              <a14:hiddenFill xmlns:a14="http://schemas.microsoft.com/office/drawing/2010/main">
+              <a14:hiddenFill xmlns:a14="http://schemas.microsoft.com/office/drawing/2010/main" xmlns="">
                 <a:solidFill>
                   <a:srgbClr val="FFFFFF"/>
                 </a:solidFill>
               </a14:hiddenFill>
             </a:ext>
             <a:ext uri="{91240B29-F687-4f45-9708-019B960494DF}">
-              <a14:hiddenLine xmlns:a14="http://schemas.microsoft.com/office/drawing/2010/main" w="9525">
+              <a14:hiddenLine xmlns:a14="http://schemas.microsoft.com/office/drawing/2010/main" xmlns="" w="9525">
                 <a:solidFill>
                   <a:srgbClr val="000000"/>
                 </a:solidFill>
@@ -11894,20 +11399,8 @@
           <a:lstStyle/>
           <a:p>
             <a:r>
-              <a:rPr lang="ja-JP" altLang="en-US" sz="2800" b="0" dirty="0" smtClean="0"/>
-              <a:t>静的型付き</a:t>
-            </a:r>
-            <a:r>
               <a:rPr lang="ja-JP" altLang="en-US" sz="2800" b="0" dirty="0"/>
-              <a:t>言語のプログラムは</a:t>
-            </a:r>
-            <a:r>
-              <a:rPr lang="ja-JP" altLang="en-US" sz="2800" b="0" dirty="0" smtClean="0"/>
-              <a:t>、コンパイル時に型</a:t>
-            </a:r>
-            <a:r>
-              <a:rPr lang="ja-JP" altLang="en-US" sz="2800" b="0" dirty="0"/>
-              <a:t>について整合性がとれている必要がある。</a:t>
+              <a:t>静的型付き言語のプログラムは、コンパイル時に型について整合性がとれている必要がある。</a:t>
             </a:r>
             <a:endParaRPr lang="en-US" altLang="ja-JP" sz="2800" b="0" dirty="0"/>
           </a:p>
@@ -11918,13 +11411,6 @@
   <p:clrMapOvr>
     <a:masterClrMapping/>
   </p:clrMapOvr>
-  <p:timing>
-    <p:tnLst>
-      <p:par>
-        <p:cTn xmlns:p14="http://schemas.microsoft.com/office/powerpoint/2010/main" id="1" dur="indefinite" restart="never" nodeType="tmRoot"/>
-      </p:par>
-    </p:tnLst>
-  </p:timing>
 </p:sld>
 </file>
 
@@ -11966,16 +11452,12 @@
           <a:lstStyle/>
           <a:p>
             <a:r>
-              <a:rPr lang="ja-JP" altLang="en-US" dirty="0" smtClean="0">
+              <a:rPr lang="ja-JP" altLang="en-US" dirty="0">
                 <a:latin typeface="Arial" charset="0"/>
                 <a:ea typeface="ＭＳ Ｐゴシック" charset="0"/>
               </a:rPr>
               <a:t>型検査</a:t>
             </a:r>
-            <a:endParaRPr lang="ja-JP" altLang="en-US" dirty="0">
-              <a:latin typeface="Arial" charset="0"/>
-              <a:ea typeface="ＭＳ Ｐゴシック" charset="0"/>
-            </a:endParaRPr>
           </a:p>
         </p:txBody>
       </p:sp>
@@ -12008,14 +11490,7 @@
                 <a:latin typeface="Arial" charset="0"/>
                 <a:ea typeface="ＭＳ Ｐゴシック" charset="0"/>
               </a:rPr>
-              <a:t>コンパイル時に、型について（その言語で定められた基準で）整合性がとれているかどうかを検査する</a:t>
-            </a:r>
-            <a:r>
-              <a:rPr lang="ja-JP" altLang="en-US" sz="2800" dirty="0" smtClean="0">
-                <a:latin typeface="Arial" charset="0"/>
-                <a:ea typeface="ＭＳ Ｐゴシック" charset="0"/>
-              </a:rPr>
-              <a:t>。</a:t>
+              <a:t>コンパイル時に、型について（その言語で定められた基準で）整合性がとれているかどうかを検査する。</a:t>
             </a:r>
             <a:endParaRPr lang="en-US" altLang="ja-JP" sz="2800" dirty="0">
               <a:latin typeface="Arial" charset="0"/>
@@ -12032,28 +11507,7 @@
                 <a:latin typeface="Arial" charset="0"/>
                 <a:ea typeface="ＭＳ Ｐゴシック" charset="0"/>
               </a:rPr>
-              <a:t>プログラムの正当性を部分的に示すことに</a:t>
-            </a:r>
-            <a:r>
-              <a:rPr lang="ja-JP" altLang="en-US" sz="2800" dirty="0" smtClean="0">
-                <a:latin typeface="Arial" charset="0"/>
-                <a:ea typeface="ＭＳ Ｐゴシック" charset="0"/>
-              </a:rPr>
-              <a:t>なる。（</a:t>
-            </a:r>
-            <a:r>
-              <a:rPr lang="ja-JP" altLang="en-US" sz="2800" dirty="0">
-                <a:latin typeface="Arial" charset="0"/>
-                <a:ea typeface="ＭＳ Ｐゴシック" charset="0"/>
-              </a:rPr>
-              <a:t>実行時のエラーを減少</a:t>
-            </a:r>
-            <a:r>
-              <a:rPr lang="ja-JP" altLang="en-US" sz="2800" dirty="0" smtClean="0">
-                <a:latin typeface="Arial" charset="0"/>
-                <a:ea typeface="ＭＳ Ｐゴシック" charset="0"/>
-              </a:rPr>
-              <a:t>させる。）</a:t>
+              <a:t>プログラムの正当性を部分的に示すことになる。（実行時のエラーを減少させる。）</a:t>
             </a:r>
             <a:endParaRPr lang="en-US" altLang="ja-JP" sz="2800" dirty="0">
               <a:latin typeface="Arial" charset="0"/>
@@ -12066,25 +11520,11 @@
               <a:buNone/>
             </a:pPr>
             <a:r>
-              <a:rPr lang="ja-JP" altLang="en-US" sz="2800" dirty="0" smtClean="0">
-                <a:latin typeface="Arial" charset="0"/>
-                <a:ea typeface="ＭＳ Ｐゴシック" charset="0"/>
-              </a:rPr>
-              <a:t>型情報は静的</a:t>
-            </a:r>
-            <a:r>
               <a:rPr lang="ja-JP" altLang="en-US" sz="2800" dirty="0">
                 <a:latin typeface="Arial" charset="0"/>
                 <a:ea typeface="ＭＳ Ｐゴシック" charset="0"/>
               </a:rPr>
-              <a:t>意味（実行しなくても</a:t>
-            </a:r>
-            <a:r>
-              <a:rPr lang="ja-JP" altLang="en-US" sz="2800" dirty="0" smtClean="0">
-                <a:latin typeface="Arial" charset="0"/>
-                <a:ea typeface="ＭＳ Ｐゴシック" charset="0"/>
-              </a:rPr>
-              <a:t>分かる情報）であり、型検査は静的意味の解析の一種。</a:t>
+              <a:t>型情報は静的意味（実行しなくても分かる情報）であり、型検査は静的意味の解析の一種。</a:t>
             </a:r>
             <a:endParaRPr lang="en-US" altLang="ja-JP" sz="2800" dirty="0">
               <a:latin typeface="Arial" charset="0"/>
@@ -12103,32 +11543,25 @@
               <a:buNone/>
             </a:pPr>
             <a:r>
-              <a:rPr lang="ja-JP" altLang="en-US" sz="2800" dirty="0" smtClean="0">
+              <a:rPr lang="ja-JP" altLang="en-US" sz="2800" dirty="0">
                 <a:latin typeface="Arial" charset="0"/>
                 <a:ea typeface="ＭＳ Ｐゴシック" charset="0"/>
               </a:rPr>
               <a:t>型検査はコンパイラの中で、構文解析</a:t>
             </a:r>
             <a:r>
-              <a:rPr lang="en-US" altLang="en-US" sz="2800" dirty="0" smtClean="0">
+              <a:rPr lang="en-US" altLang="en-US" sz="2800" dirty="0">
                 <a:latin typeface="Arial" charset="0"/>
                 <a:ea typeface="ＭＳ Ｐゴシック" charset="0"/>
               </a:rPr>
               <a:t>より</a:t>
             </a:r>
             <a:r>
-              <a:rPr lang="ja-JP" altLang="en-US" sz="2800" dirty="0" smtClean="0">
-                <a:latin typeface="Arial" charset="0"/>
-                <a:ea typeface="ＭＳ Ｐゴシック" charset="0"/>
-              </a:rPr>
-              <a:t>後</a:t>
-            </a:r>
-            <a:r>
               <a:rPr lang="ja-JP" altLang="en-US" sz="2800" dirty="0">
                 <a:latin typeface="Arial" charset="0"/>
                 <a:ea typeface="ＭＳ Ｐゴシック" charset="0"/>
               </a:rPr>
-              <a:t>のフェーズで行う。</a:t>
+              <a:t>後のフェーズで行う。</a:t>
             </a:r>
             <a:endParaRPr lang="en-US" altLang="ja-JP" sz="2800" dirty="0">
               <a:latin typeface="Arial" charset="0"/>
@@ -12142,13 +11575,6 @@
   <p:clrMapOvr>
     <a:masterClrMapping/>
   </p:clrMapOvr>
-  <p:timing>
-    <p:tnLst>
-      <p:par>
-        <p:cTn xmlns:p14="http://schemas.microsoft.com/office/powerpoint/2010/main" id="1" dur="indefinite" restart="never" nodeType="tmRoot"/>
-      </p:par>
-    </p:tnLst>
-  </p:timing>
 </p:sld>
 </file>
 
@@ -12196,21 +11622,7 @@
                 <a:latin typeface="Arial" charset="0"/>
                 <a:ea typeface="ＭＳ Ｐゴシック" charset="0"/>
               </a:rPr>
-              <a:t>言語</a:t>
-            </a:r>
-            <a:r>
-              <a:rPr lang="ja-JP" altLang="en-US" dirty="0" smtClean="0">
-                <a:latin typeface="Arial" charset="0"/>
-                <a:ea typeface="ＭＳ Ｐゴシック" charset="0"/>
-              </a:rPr>
-              <a:t>の変数宣言</a:t>
-            </a:r>
-            <a:r>
-              <a:rPr lang="ja-JP" altLang="en-US" dirty="0">
-                <a:latin typeface="Arial" charset="0"/>
-                <a:ea typeface="ＭＳ Ｐゴシック" charset="0"/>
-              </a:rPr>
-              <a:t>について</a:t>
+              <a:t>言語の変数宣言について</a:t>
             </a:r>
           </a:p>
         </p:txBody>
@@ -12251,14 +11663,7 @@
                 <a:latin typeface="Arial" charset="0"/>
                 <a:ea typeface="ＭＳ Ｐゴシック" charset="0"/>
               </a:rPr>
-              <a:t>（例</a:t>
-            </a:r>
-            <a:r>
-              <a:rPr lang="ja-JP" altLang="en-US" dirty="0" smtClean="0">
-                <a:latin typeface="Arial" charset="0"/>
-                <a:ea typeface="ＭＳ Ｐゴシック" charset="0"/>
-              </a:rPr>
-              <a:t>）</a:t>
+              <a:t>（例）</a:t>
             </a:r>
             <a:r>
               <a:rPr lang="en-US" altLang="ja-JP" dirty="0">
@@ -12268,25 +11673,18 @@
               <a:t> </a:t>
             </a:r>
             <a:r>
-              <a:rPr lang="en-US" altLang="ja-JP" dirty="0" err="1" smtClean="0">
+              <a:rPr lang="en-US" altLang="ja-JP" dirty="0" err="1">
                 <a:latin typeface="Arial" charset="0"/>
                 <a:ea typeface="ＭＳ Ｐゴシック" charset="0"/>
               </a:rPr>
               <a:t>int</a:t>
             </a:r>
             <a:r>
-              <a:rPr lang="en-US" altLang="ja-JP" dirty="0" smtClean="0">
-                <a:latin typeface="Arial" charset="0"/>
-                <a:ea typeface="ＭＳ Ｐゴシック" charset="0"/>
-              </a:rPr>
-              <a:t> </a:t>
-            </a:r>
-            <a:r>
               <a:rPr lang="en-US" altLang="ja-JP" dirty="0">
                 <a:latin typeface="Arial" charset="0"/>
                 <a:ea typeface="ＭＳ Ｐゴシック" charset="0"/>
               </a:rPr>
-              <a:t>(*a) [13];</a:t>
+              <a:t> (*a) [13];</a:t>
             </a:r>
           </a:p>
           <a:p>
@@ -12327,35 +11725,21 @@
                 <a:latin typeface="Arial" charset="0"/>
                 <a:ea typeface="ＭＳ Ｐゴシック" charset="0"/>
               </a:rPr>
-              <a:t>型の配列（要素</a:t>
-            </a:r>
-            <a:r>
-              <a:rPr lang="ja-JP" altLang="en-US" dirty="0" smtClean="0">
-                <a:latin typeface="Arial" charset="0"/>
-                <a:ea typeface="ＭＳ Ｐゴシック" charset="0"/>
-              </a:rPr>
-              <a:t>数</a:t>
-            </a:r>
-            <a:r>
-              <a:rPr lang="en-US" altLang="ja-JP" dirty="0" smtClean="0">
+              <a:t>型の配列（要素数</a:t>
+            </a:r>
+            <a:r>
+              <a:rPr lang="en-US" altLang="ja-JP" dirty="0">
                 <a:latin typeface="Arial" charset="0"/>
                 <a:ea typeface="ＭＳ Ｐゴシック" charset="0"/>
               </a:rPr>
               <a:t>13</a:t>
             </a:r>
             <a:r>
-              <a:rPr lang="ja-JP" altLang="en-US" dirty="0" smtClean="0">
-                <a:latin typeface="Arial" charset="0"/>
-                <a:ea typeface="ＭＳ Ｐゴシック" charset="0"/>
-              </a:rPr>
-              <a:t>）</a:t>
-            </a:r>
-            <a:r>
               <a:rPr lang="ja-JP" altLang="en-US" dirty="0">
                 <a:latin typeface="Arial" charset="0"/>
                 <a:ea typeface="ＭＳ Ｐゴシック" charset="0"/>
               </a:rPr>
-              <a:t>へのポインタ型であることを示す。</a:t>
+              <a:t>）へのポインタ型であることを示す。</a:t>
             </a:r>
             <a:endParaRPr lang="en-US" altLang="ja-JP" dirty="0">
               <a:latin typeface="Arial" charset="0"/>
@@ -12470,13 +11854,6 @@
   <p:clrMapOvr>
     <a:masterClrMapping/>
   </p:clrMapOvr>
-  <p:timing>
-    <p:tnLst>
-      <p:par>
-        <p:cTn xmlns:p14="http://schemas.microsoft.com/office/powerpoint/2010/main" id="1" dur="indefinite" restart="never" nodeType="tmRoot"/>
-      </p:par>
-    </p:tnLst>
-  </p:timing>
 </p:sld>
 </file>
 
@@ -12529,21 +11906,7 @@
                 <a:latin typeface="Arial" charset="0"/>
                 <a:ea typeface="ＭＳ Ｐゴシック" charset="0"/>
               </a:rPr>
-              <a:t>言語</a:t>
-            </a:r>
-            <a:r>
-              <a:rPr lang="ja-JP" altLang="en-US" dirty="0" smtClean="0">
-                <a:latin typeface="Arial" charset="0"/>
-                <a:ea typeface="ＭＳ Ｐゴシック" charset="0"/>
-              </a:rPr>
-              <a:t>の変数宣言</a:t>
-            </a:r>
-            <a:r>
-              <a:rPr lang="ja-JP" altLang="en-US" dirty="0">
-                <a:latin typeface="Arial" charset="0"/>
-                <a:ea typeface="ＭＳ Ｐゴシック" charset="0"/>
-              </a:rPr>
-              <a:t>について</a:t>
+              <a:t>言語の変数宣言について</a:t>
             </a:r>
           </a:p>
         </p:txBody>
@@ -12655,14 +12018,7 @@
                 <a:latin typeface="Arial" charset="0"/>
                 <a:ea typeface="ＭＳ Ｐゴシック" charset="0"/>
               </a:rPr>
-              <a:t>    a = </a:t>
-            </a:r>
-            <a:r>
-              <a:rPr lang="en-US" altLang="ja-JP" sz="2800" dirty="0" smtClean="0">
-                <a:latin typeface="Arial" charset="0"/>
-                <a:ea typeface="ＭＳ Ｐゴシック" charset="0"/>
-              </a:rPr>
-              <a:t>b</a:t>
+              <a:t>    a = b</a:t>
             </a:r>
           </a:p>
           <a:p>
@@ -12675,52 +12031,7 @@
                 <a:latin typeface="Arial" charset="0"/>
                 <a:ea typeface="ＭＳ Ｐゴシック" charset="0"/>
               </a:rPr>
-              <a:t>は型について整合性のある代入式である</a:t>
-            </a:r>
-            <a:r>
-              <a:rPr lang="ja-JP" altLang="en-US" sz="2800" dirty="0" smtClean="0">
-                <a:latin typeface="Arial" charset="0"/>
-                <a:ea typeface="ＭＳ Ｐゴシック" charset="0"/>
-              </a:rPr>
-              <a:t>。</a:t>
-            </a:r>
-            <a:r>
-              <a:rPr lang="ja-JP" altLang="en-US" sz="2800" dirty="0" smtClean="0">
-                <a:latin typeface="Arial" charset="0"/>
-                <a:ea typeface="ＭＳ Ｐゴシック" charset="0"/>
-              </a:rPr>
-              <a:t>このような型の整合性のチェックの仕組みの基礎を学習する。</a:t>
-            </a:r>
-            <a:endParaRPr lang="en-US" altLang="ja-JP" sz="2800" dirty="0" smtClean="0">
-              <a:latin typeface="Arial" charset="0"/>
-              <a:ea typeface="ＭＳ Ｐゴシック" charset="0"/>
-            </a:endParaRPr>
-          </a:p>
-          <a:p>
-            <a:pPr marL="0" indent="0">
-              <a:buFontTx/>
-              <a:buNone/>
-            </a:pPr>
-            <a:r>
-              <a:rPr lang="ja-JP" altLang="en-US" sz="2800" dirty="0" smtClean="0">
-                <a:latin typeface="Arial" charset="0"/>
-                <a:ea typeface="ＭＳ Ｐゴシック" charset="0"/>
-              </a:rPr>
-              <a:t>（参考）</a:t>
-            </a:r>
-            <a:r>
-              <a:rPr lang="ja-JP" altLang="en-US" sz="2800" dirty="0" smtClean="0">
-                <a:latin typeface="Arial" charset="0"/>
-                <a:ea typeface="ＭＳ Ｐゴシック" charset="0"/>
-              </a:rPr>
-              <a:t>この</a:t>
-            </a:r>
-            <a:r>
-              <a:rPr lang="ja-JP" altLang="en-US" sz="2800" dirty="0">
-                <a:latin typeface="Arial" charset="0"/>
-                <a:ea typeface="ＭＳ Ｐゴシック" charset="0"/>
-              </a:rPr>
-              <a:t>代入式の実行後に等式</a:t>
+              <a:t>は型について整合性のある代入式である。このような型の整合性のチェックの仕組みの基礎を学習する。</a:t>
             </a:r>
             <a:endParaRPr lang="en-US" altLang="ja-JP" sz="2800" dirty="0">
               <a:latin typeface="Arial" charset="0"/>
@@ -12733,35 +12044,13 @@
               <a:buNone/>
             </a:pPr>
             <a:r>
-              <a:rPr lang="en-US" altLang="ja-JP" sz="2800" dirty="0" smtClean="0">
-                <a:latin typeface="Arial" charset="0"/>
-                <a:ea typeface="ＭＳ Ｐゴシック" charset="0"/>
-              </a:rPr>
-              <a:t>    (</a:t>
-            </a:r>
-            <a:r>
-              <a:rPr lang="en-US" altLang="ja-JP" sz="2800" dirty="0">
-                <a:latin typeface="Arial" charset="0"/>
-                <a:ea typeface="ＭＳ Ｐゴシック" charset="0"/>
-              </a:rPr>
-              <a:t>*a) [ j ] = b[0][ j ] (0 </a:t>
-            </a:r>
-            <a:r>
-              <a:rPr lang="en-US" altLang="ja-JP" sz="2800" dirty="0">
-                <a:latin typeface="Arial" charset="0"/>
-                <a:ea typeface="ＭＳ Ｐゴシック" charset="0"/>
-                <a:sym typeface="Symbol" charset="0"/>
-              </a:rPr>
-              <a:t>  </a:t>
-            </a:r>
-            <a:r>
-              <a:rPr lang="en-US" altLang="ja-JP" sz="2800" dirty="0">
-                <a:latin typeface="Arial" charset="0"/>
-                <a:ea typeface="ＭＳ Ｐゴシック" charset="0"/>
-              </a:rPr>
-              <a:t>j &lt; 13) </a:t>
-            </a:r>
-            <a:endParaRPr lang="en-US" altLang="ja-JP" sz="2800" dirty="0" smtClean="0">
+              <a:rPr lang="ja-JP" altLang="en-US" sz="2800" dirty="0">
+                <a:latin typeface="Arial" charset="0"/>
+                <a:ea typeface="ＭＳ Ｐゴシック" charset="0"/>
+              </a:rPr>
+              <a:t>（参考）この代入式の実行後に等式</a:t>
+            </a:r>
+            <a:endParaRPr lang="en-US" altLang="ja-JP" sz="2800" dirty="0">
               <a:latin typeface="Arial" charset="0"/>
               <a:ea typeface="ＭＳ Ｐゴシック" charset="0"/>
             </a:endParaRPr>
@@ -12772,18 +12061,39 @@
               <a:buNone/>
             </a:pPr>
             <a:r>
-              <a:rPr lang="ja-JP" altLang="en-US" sz="2800" dirty="0" smtClean="0">
-                <a:latin typeface="Arial" charset="0"/>
-                <a:ea typeface="ＭＳ Ｐゴシック" charset="0"/>
-              </a:rPr>
-              <a:t>が成立する。これ</a:t>
-            </a:r>
+              <a:rPr lang="en-US" altLang="ja-JP" sz="2800" dirty="0">
+                <a:latin typeface="Arial" charset="0"/>
+                <a:ea typeface="ＭＳ Ｐゴシック" charset="0"/>
+              </a:rPr>
+              <a:t>    (*a) [ j ] = b[0][ j ] (0 </a:t>
+            </a:r>
+            <a:r>
+              <a:rPr lang="en-US" altLang="ja-JP" sz="2800" dirty="0">
+                <a:latin typeface="Arial" charset="0"/>
+                <a:ea typeface="ＭＳ Ｐゴシック" charset="0"/>
+                <a:sym typeface="Symbol" charset="0"/>
+              </a:rPr>
+              <a:t>  </a:t>
+            </a:r>
+            <a:r>
+              <a:rPr lang="en-US" altLang="ja-JP" sz="2800" dirty="0">
+                <a:latin typeface="Arial" charset="0"/>
+                <a:ea typeface="ＭＳ Ｐゴシック" charset="0"/>
+              </a:rPr>
+              <a:t>j &lt; 13) </a:t>
+            </a:r>
+          </a:p>
+          <a:p>
+            <a:pPr marL="0" indent="0">
+              <a:buFontTx/>
+              <a:buNone/>
+            </a:pPr>
             <a:r>
               <a:rPr lang="ja-JP" altLang="en-US" sz="2800" dirty="0">
                 <a:latin typeface="Arial" charset="0"/>
                 <a:ea typeface="ＭＳ Ｐゴシック" charset="0"/>
               </a:rPr>
-              <a:t>は、</a:t>
+              <a:t>が成立する。これは、</a:t>
             </a:r>
             <a:r>
               <a:rPr lang="en-US" altLang="ja-JP" sz="2800" dirty="0">
@@ -12811,45 +12121,31 @@
                 <a:latin typeface="Arial" charset="0"/>
                 <a:ea typeface="ＭＳ Ｐゴシック" charset="0"/>
               </a:rPr>
-              <a:t>をつければ</a:t>
-            </a:r>
-            <a:r>
-              <a:rPr lang="ja-JP" altLang="en-US" sz="2800" dirty="0" smtClean="0">
-                <a:latin typeface="Arial" charset="0"/>
-                <a:ea typeface="ＭＳ Ｐゴシック" charset="0"/>
-              </a:rPr>
-              <a:t>得られる</a:t>
-            </a:r>
-            <a:r>
-              <a:rPr lang="ja-JP" altLang="en-US" sz="2800" dirty="0" smtClean="0">
-                <a:latin typeface="Arial" charset="0"/>
-                <a:ea typeface="ＭＳ Ｐゴシック" charset="0"/>
-              </a:rPr>
-              <a:t>（等式</a:t>
-            </a:r>
-            <a:r>
-              <a:rPr lang="en-US" altLang="ja-JP" sz="2800" dirty="0" smtClean="0">
+              <a:t>をつければ得られる（等式</a:t>
+            </a:r>
+            <a:r>
+              <a:rPr lang="en-US" altLang="ja-JP" sz="2800" dirty="0">
                 <a:latin typeface="Arial" charset="0"/>
                 <a:ea typeface="ＭＳ Ｐゴシック" charset="0"/>
               </a:rPr>
               <a:t>a=b</a:t>
             </a:r>
             <a:r>
-              <a:rPr lang="ja-JP" altLang="en-US" sz="2800" dirty="0" smtClean="0">
+              <a:rPr lang="ja-JP" altLang="en-US" sz="2800" dirty="0">
                 <a:latin typeface="Arial" charset="0"/>
                 <a:ea typeface="ＭＳ Ｐゴシック" charset="0"/>
               </a:rPr>
               <a:t>の両辺に</a:t>
             </a:r>
             <a:r>
-              <a:rPr lang="en-US" altLang="ja-JP" sz="2800" dirty="0" smtClean="0">
+              <a:rPr lang="en-US" altLang="ja-JP" sz="2800" dirty="0">
                 <a:latin typeface="Arial" charset="0"/>
                 <a:ea typeface="ＭＳ Ｐゴシック" charset="0"/>
               </a:rPr>
               <a:t>*</a:t>
             </a:r>
             <a:r>
-              <a:rPr lang="ja-JP" altLang="en-US" sz="2800" dirty="0" smtClean="0">
+              <a:rPr lang="ja-JP" altLang="en-US" sz="2800" dirty="0">
                 <a:latin typeface="Arial" charset="0"/>
                 <a:ea typeface="ＭＳ Ｐゴシック" charset="0"/>
               </a:rPr>
@@ -12881,19 +12177,8 @@
                 <a:latin typeface="Arial" charset="0"/>
                 <a:ea typeface="ＭＳ Ｐゴシック" charset="0"/>
               </a:rPr>
-              <a:t>に置き換えられる</a:t>
-            </a:r>
-            <a:r>
-              <a:rPr lang="ja-JP" altLang="en-US" sz="2800" dirty="0" smtClean="0">
-                <a:latin typeface="Arial" charset="0"/>
-                <a:ea typeface="ＭＳ Ｐゴシック" charset="0"/>
-              </a:rPr>
-              <a:t>。</a:t>
-            </a:r>
-            <a:endParaRPr lang="ja-JP" altLang="en-US" sz="2800" dirty="0">
-              <a:latin typeface="Arial" charset="0"/>
-              <a:ea typeface="ＭＳ Ｐゴシック" charset="0"/>
-            </a:endParaRPr>
+              <a:t>に置き換えられる。</a:t>
+            </a:r>
           </a:p>
         </p:txBody>
       </p:sp>
@@ -12902,13 +12187,6 @@
   <p:clrMapOvr>
     <a:masterClrMapping/>
   </p:clrMapOvr>
-  <p:timing>
-    <p:tnLst>
-      <p:par>
-        <p:cTn xmlns:p14="http://schemas.microsoft.com/office/powerpoint/2010/main" id="1" dur="indefinite" restart="never" nodeType="tmRoot"/>
-      </p:par>
-    </p:tnLst>
-  </p:timing>
 </p:sld>
 </file>
 
@@ -12961,21 +12239,7 @@
                 <a:latin typeface="Arial" charset="0"/>
                 <a:ea typeface="ＭＳ Ｐゴシック" charset="0"/>
               </a:rPr>
-              <a:t>言語</a:t>
-            </a:r>
-            <a:r>
-              <a:rPr lang="ja-JP" altLang="en-US" dirty="0" smtClean="0">
-                <a:latin typeface="Arial" charset="0"/>
-                <a:ea typeface="ＭＳ Ｐゴシック" charset="0"/>
-              </a:rPr>
-              <a:t>の変数宣言</a:t>
-            </a:r>
-            <a:r>
-              <a:rPr lang="ja-JP" altLang="en-US" dirty="0">
-                <a:latin typeface="Arial" charset="0"/>
-                <a:ea typeface="ＭＳ Ｐゴシック" charset="0"/>
-              </a:rPr>
-              <a:t>について</a:t>
+              <a:t>言語の変数宣言について</a:t>
             </a:r>
           </a:p>
         </p:txBody>
@@ -13005,42 +12269,21 @@
               <a:buNone/>
             </a:pPr>
             <a:r>
-              <a:rPr lang="en-US" altLang="ja-JP" sz="2800" dirty="0" smtClean="0">
-                <a:latin typeface="Arial" charset="0"/>
-                <a:ea typeface="ＭＳ Ｐゴシック" charset="0"/>
-              </a:rPr>
-              <a:t>    char </a:t>
-            </a:r>
-            <a:r>
               <a:rPr lang="en-US" altLang="ja-JP" sz="2800" dirty="0">
                 <a:latin typeface="Arial" charset="0"/>
                 <a:ea typeface="ＭＳ Ｐゴシック" charset="0"/>
               </a:rPr>
-              <a:t>( * ( * x ( ) ) </a:t>
-            </a:r>
-            <a:r>
-              <a:rPr lang="en-US" altLang="ja-JP" sz="2800" dirty="0" smtClean="0">
-                <a:latin typeface="Arial" charset="0"/>
-                <a:ea typeface="ＭＳ Ｐゴシック" charset="0"/>
-              </a:rPr>
-              <a:t>[3] </a:t>
+              <a:t>    char ( * ( * x ( ) ) [3] ) ( )</a:t>
+            </a:r>
+            <a:r>
+              <a:rPr lang="ja-JP" altLang="en-US" sz="2800" dirty="0">
+                <a:latin typeface="Arial" charset="0"/>
+                <a:ea typeface="ＭＳ Ｐゴシック" charset="0"/>
+              </a:rPr>
+              <a:t> </a:t>
             </a:r>
             <a:r>
               <a:rPr lang="en-US" altLang="ja-JP" sz="2800" dirty="0">
-                <a:latin typeface="Arial" charset="0"/>
-                <a:ea typeface="ＭＳ Ｐゴシック" charset="0"/>
-              </a:rPr>
-              <a:t>) ( )</a:t>
-            </a:r>
-            <a:r>
-              <a:rPr lang="ja-JP" altLang="en-US" sz="2800" dirty="0">
-                <a:latin typeface="Arial" charset="0"/>
-                <a:ea typeface="ＭＳ Ｐゴシック" charset="0"/>
-              </a:rPr>
-              <a:t> </a:t>
-            </a:r>
-            <a:r>
-              <a:rPr lang="en-US" altLang="ja-JP" sz="2800" dirty="0" smtClean="0">
                 <a:latin typeface="Arial" charset="0"/>
                 <a:ea typeface="ＭＳ Ｐゴシック" charset="0"/>
               </a:rPr>
@@ -13053,25 +12296,11 @@
               <a:buNone/>
             </a:pPr>
             <a:r>
-              <a:rPr lang="ja-JP" altLang="en-US" sz="2800" dirty="0" smtClean="0">
-                <a:latin typeface="Arial" charset="0"/>
-                <a:ea typeface="ＭＳ Ｐゴシック" charset="0"/>
-              </a:rPr>
-              <a:t>の変数宣言</a:t>
-            </a:r>
-            <a:r>
               <a:rPr lang="ja-JP" altLang="en-US" sz="2800" dirty="0">
                 <a:latin typeface="Arial" charset="0"/>
                 <a:ea typeface="ＭＳ Ｐゴシック" charset="0"/>
               </a:rPr>
-              <a:t>の意味は</a:t>
-            </a:r>
-            <a:r>
-              <a:rPr lang="ja-JP" altLang="en-US" sz="2800" dirty="0" smtClean="0">
-                <a:latin typeface="Arial" charset="0"/>
-                <a:ea typeface="ＭＳ Ｐゴシック" charset="0"/>
-              </a:rPr>
-              <a:t>？</a:t>
+              <a:t>の変数宣言の意味は？</a:t>
             </a:r>
             <a:endParaRPr lang="en-US" altLang="ja-JP" sz="2800" dirty="0">
               <a:latin typeface="Arial" charset="0"/>
@@ -13088,24 +12317,17 @@
                 <a:latin typeface="Arial" charset="0"/>
                 <a:ea typeface="ＭＳ Ｐゴシック" charset="0"/>
               </a:rPr>
-              <a:t>内側から順番に優先</a:t>
-            </a:r>
-            <a:r>
-              <a:rPr lang="ja-JP" altLang="en-US" sz="2800" dirty="0" smtClean="0">
-                <a:latin typeface="Arial" charset="0"/>
-                <a:ea typeface="ＭＳ Ｐゴシック" charset="0"/>
-              </a:rPr>
-              <a:t>順位（次ページ記載）にしたがって読んでいき、最後に</a:t>
-            </a:r>
-            <a:r>
-              <a:rPr lang="en-US" altLang="ja-JP" sz="2800" dirty="0" smtClean="0">
+              <a:t>内側から順番に優先順位（次ページ記載）にしたがって読んでいき、最後に</a:t>
+            </a:r>
+            <a:r>
+              <a:rPr lang="en-US" altLang="ja-JP" sz="2800" dirty="0">
                 <a:latin typeface="Arial" charset="0"/>
                 <a:ea typeface="ＭＳ Ｐゴシック" charset="0"/>
               </a:rPr>
               <a:t>char</a:t>
             </a:r>
             <a:r>
-              <a:rPr lang="ja-JP" altLang="en-US" sz="2800" dirty="0" smtClean="0">
+              <a:rPr lang="ja-JP" altLang="en-US" sz="2800" dirty="0">
                 <a:latin typeface="Arial" charset="0"/>
                 <a:ea typeface="ＭＳ Ｐゴシック" charset="0"/>
               </a:rPr>
@@ -13122,32 +12344,11 @@
               <a:buNone/>
             </a:pPr>
             <a:r>
-              <a:rPr lang="en-US" altLang="ja-JP" sz="2800" dirty="0" smtClean="0">
-                <a:latin typeface="Arial" charset="0"/>
-                <a:ea typeface="ＭＳ Ｐゴシック" charset="0"/>
-              </a:rPr>
-              <a:t>    </a:t>
-            </a:r>
-            <a:r>
               <a:rPr lang="en-US" altLang="ja-JP" sz="2800" dirty="0">
                 <a:latin typeface="Arial" charset="0"/>
                 <a:ea typeface="ＭＳ Ｐゴシック" charset="0"/>
               </a:rPr>
-              <a:t>( )  *  </a:t>
-            </a:r>
-            <a:r>
-              <a:rPr lang="en-US" altLang="ja-JP" sz="2800" dirty="0" smtClean="0">
-                <a:latin typeface="Arial" charset="0"/>
-                <a:ea typeface="ＭＳ Ｐゴシック" charset="0"/>
-              </a:rPr>
-              <a:t>[3]  </a:t>
-            </a:r>
-            <a:r>
-              <a:rPr lang="en-US" altLang="ja-JP" sz="2800" dirty="0">
-                <a:latin typeface="Arial" charset="0"/>
-                <a:ea typeface="ＭＳ Ｐゴシック" charset="0"/>
-              </a:rPr>
-              <a:t>*  ( )  char</a:t>
+              <a:t>    ( )  *  [3]  *  ( )  char</a:t>
             </a:r>
           </a:p>
           <a:p>
@@ -13160,129 +12361,7 @@
                 <a:latin typeface="Arial" charset="0"/>
                 <a:ea typeface="ＭＳ Ｐゴシック" charset="0"/>
               </a:rPr>
-              <a:t>となる</a:t>
-            </a:r>
-            <a:r>
-              <a:rPr lang="ja-JP" altLang="en-US" sz="2800" dirty="0" smtClean="0">
-                <a:latin typeface="Arial" charset="0"/>
-                <a:ea typeface="ＭＳ Ｐゴシック" charset="0"/>
-              </a:rPr>
-              <a:t>。これを逆順にすると</a:t>
-            </a:r>
-            <a:endParaRPr lang="en-US" altLang="ja-JP" sz="2800" dirty="0" smtClean="0">
-              <a:latin typeface="Arial" charset="0"/>
-              <a:ea typeface="ＭＳ Ｐゴシック" charset="0"/>
-            </a:endParaRPr>
-          </a:p>
-          <a:p>
-            <a:pPr marL="0" indent="0">
-              <a:buNone/>
-            </a:pPr>
-            <a:r>
-              <a:rPr lang="en-US" altLang="ja-JP" sz="2800" dirty="0" smtClean="0">
-                <a:latin typeface="Arial" charset="0"/>
-                <a:ea typeface="ＭＳ Ｐゴシック" charset="0"/>
-              </a:rPr>
-              <a:t>    </a:t>
-            </a:r>
-            <a:r>
-              <a:rPr lang="en-US" altLang="ja-JP" sz="2800" dirty="0">
-                <a:latin typeface="Arial" charset="0"/>
-                <a:ea typeface="ＭＳ Ｐゴシック" charset="0"/>
-              </a:rPr>
-              <a:t>char  ( )  *  </a:t>
-            </a:r>
-            <a:r>
-              <a:rPr lang="en-US" altLang="ja-JP" sz="2800" dirty="0" smtClean="0">
-                <a:latin typeface="Arial" charset="0"/>
-                <a:ea typeface="ＭＳ Ｐゴシック" charset="0"/>
-              </a:rPr>
-              <a:t>[3]  </a:t>
-            </a:r>
-            <a:r>
-              <a:rPr lang="en-US" altLang="ja-JP" sz="2800" dirty="0">
-                <a:latin typeface="Arial" charset="0"/>
-                <a:ea typeface="ＭＳ Ｐゴシック" charset="0"/>
-              </a:rPr>
-              <a:t>*  ( </a:t>
-            </a:r>
-            <a:r>
-              <a:rPr lang="en-US" altLang="ja-JP" sz="2800" dirty="0" smtClean="0">
-                <a:latin typeface="Arial" charset="0"/>
-                <a:ea typeface="ＭＳ Ｐゴシック" charset="0"/>
-              </a:rPr>
-              <a:t>)</a:t>
-            </a:r>
-          </a:p>
-          <a:p>
-            <a:pPr marL="0" indent="0">
-              <a:buNone/>
-            </a:pPr>
-            <a:r>
-              <a:rPr lang="ja-JP" altLang="en-US" sz="2800" dirty="0" smtClean="0">
-                <a:latin typeface="Arial" charset="0"/>
-                <a:ea typeface="ＭＳ Ｐゴシック" charset="0"/>
-              </a:rPr>
-              <a:t>となる。これを型の後置記法と呼ぶことにする（一般に通用する用語ではない）。これを</a:t>
-            </a:r>
-            <a:r>
-              <a:rPr lang="en-US" altLang="ja-JP" sz="2800" dirty="0" smtClean="0">
-                <a:latin typeface="Arial" charset="0"/>
-                <a:ea typeface="ＭＳ Ｐゴシック" charset="0"/>
-              </a:rPr>
-              <a:t>x : </a:t>
-            </a:r>
-            <a:r>
-              <a:rPr lang="ja-JP" altLang="en-US" sz="2800" dirty="0" smtClean="0">
-                <a:latin typeface="Arial" charset="0"/>
-                <a:ea typeface="ＭＳ Ｐゴシック" charset="0"/>
-              </a:rPr>
-              <a:t>の後に書いた</a:t>
-            </a:r>
-            <a:endParaRPr lang="en-US" altLang="ja-JP" sz="2800" dirty="0" smtClean="0">
-              <a:latin typeface="Arial" charset="0"/>
-              <a:ea typeface="ＭＳ Ｐゴシック" charset="0"/>
-            </a:endParaRPr>
-          </a:p>
-          <a:p>
-            <a:pPr marL="0" indent="0">
-              <a:buFontTx/>
-              <a:buNone/>
-            </a:pPr>
-            <a:r>
-              <a:rPr lang="en-US" altLang="ja-JP" sz="2800" dirty="0" smtClean="0">
-                <a:latin typeface="Arial" charset="0"/>
-                <a:ea typeface="ＭＳ Ｐゴシック" charset="0"/>
-              </a:rPr>
-              <a:t>   </a:t>
-            </a:r>
-            <a:r>
-              <a:rPr lang="en-US" altLang="ja-JP" sz="2800" dirty="0">
-                <a:latin typeface="Arial" charset="0"/>
-                <a:ea typeface="ＭＳ Ｐゴシック" charset="0"/>
-              </a:rPr>
-              <a:t>x : char  ( )  *  </a:t>
-            </a:r>
-            <a:r>
-              <a:rPr lang="en-US" altLang="ja-JP" sz="2800" dirty="0" smtClean="0">
-                <a:latin typeface="Arial" charset="0"/>
-                <a:ea typeface="ＭＳ Ｐゴシック" charset="0"/>
-              </a:rPr>
-              <a:t>[3]  </a:t>
-            </a:r>
-            <a:r>
-              <a:rPr lang="en-US" altLang="ja-JP" sz="2800" dirty="0">
-                <a:latin typeface="Arial" charset="0"/>
-                <a:ea typeface="ＭＳ Ｐゴシック" charset="0"/>
-              </a:rPr>
-              <a:t>*  ( </a:t>
-            </a:r>
-            <a:r>
-              <a:rPr lang="en-US" altLang="ja-JP" sz="2800" dirty="0" smtClean="0">
-                <a:latin typeface="Arial" charset="0"/>
-                <a:ea typeface="ＭＳ Ｐゴシック" charset="0"/>
-              </a:rPr>
-              <a:t>)</a:t>
+              <a:t>となる。これを逆順にすると</a:t>
             </a:r>
             <a:endParaRPr lang="en-US" altLang="ja-JP" sz="2800" dirty="0">
               <a:latin typeface="Arial" charset="0"/>
@@ -13291,11 +12370,66 @@
           </a:p>
           <a:p>
             <a:pPr marL="0" indent="0">
+              <a:buNone/>
+            </a:pPr>
+            <a:r>
+              <a:rPr lang="en-US" altLang="ja-JP" sz="2800" dirty="0">
+                <a:latin typeface="Arial" charset="0"/>
+                <a:ea typeface="ＭＳ Ｐゴシック" charset="0"/>
+              </a:rPr>
+              <a:t>    char  ( )  *  [3]  *  ( )</a:t>
+            </a:r>
+          </a:p>
+          <a:p>
+            <a:pPr marL="0" indent="0">
+              <a:buNone/>
+            </a:pPr>
+            <a:r>
+              <a:rPr lang="ja-JP" altLang="en-US" sz="2800" dirty="0">
+                <a:latin typeface="Arial" charset="0"/>
+                <a:ea typeface="ＭＳ Ｐゴシック" charset="0"/>
+              </a:rPr>
+              <a:t>となる。これを型の後置記法と呼ぶことにする（一般に通用する用語ではない）。これを</a:t>
+            </a:r>
+            <a:r>
+              <a:rPr lang="en-US" altLang="ja-JP" sz="2800" dirty="0">
+                <a:latin typeface="Arial" charset="0"/>
+                <a:ea typeface="ＭＳ Ｐゴシック" charset="0"/>
+              </a:rPr>
+              <a:t>x : </a:t>
+            </a:r>
+            <a:r>
+              <a:rPr lang="ja-JP" altLang="en-US" sz="2800" dirty="0">
+                <a:latin typeface="Arial" charset="0"/>
+                <a:ea typeface="ＭＳ Ｐゴシック" charset="0"/>
+              </a:rPr>
+              <a:t>の後に書いた</a:t>
+            </a:r>
+            <a:endParaRPr lang="en-US" altLang="ja-JP" sz="2800" dirty="0">
+              <a:latin typeface="Arial" charset="0"/>
+              <a:ea typeface="ＭＳ Ｐゴシック" charset="0"/>
+            </a:endParaRPr>
+          </a:p>
+          <a:p>
+            <a:pPr marL="0" indent="0">
               <a:buFontTx/>
               <a:buNone/>
             </a:pPr>
             <a:r>
-              <a:rPr lang="ja-JP" altLang="en-US" sz="2800" dirty="0" smtClean="0">
+              <a:rPr lang="en-US" altLang="ja-JP" sz="2800" dirty="0">
+                <a:latin typeface="Arial" charset="0"/>
+                <a:ea typeface="ＭＳ Ｐゴシック" charset="0"/>
+              </a:rPr>
+              <a:t>   x : char  ( )  *  [3]  *  ( )</a:t>
+            </a:r>
+          </a:p>
+          <a:p>
+            <a:pPr marL="0" indent="0">
+              <a:buFontTx/>
+              <a:buNone/>
+            </a:pPr>
+            <a:r>
+              <a:rPr lang="ja-JP" altLang="en-US" sz="2800" dirty="0">
                 <a:latin typeface="Arial" charset="0"/>
                 <a:ea typeface="ＭＳ Ｐゴシック" charset="0"/>
               </a:rPr>
@@ -13313,13 +12447,6 @@
   <p:clrMapOvr>
     <a:masterClrMapping/>
   </p:clrMapOvr>
-  <p:timing>
-    <p:tnLst>
-      <p:par>
-        <p:cTn xmlns:p14="http://schemas.microsoft.com/office/powerpoint/2010/main" id="1" dur="indefinite" restart="never" nodeType="tmRoot"/>
-      </p:par>
-    </p:tnLst>
-  </p:timing>
 </p:sld>
 </file>
 
@@ -13392,14 +12519,14 @@
           </a:ln>
           <a:extLst>
             <a:ext uri="{909E8E84-426E-40dd-AFC4-6F175D3DCCD1}">
-              <a14:hiddenFill xmlns:a14="http://schemas.microsoft.com/office/drawing/2010/main">
+              <a14:hiddenFill xmlns:a14="http://schemas.microsoft.com/office/drawing/2010/main" xmlns="">
                 <a:solidFill>
                   <a:srgbClr val="FFFFFF"/>
                 </a:solidFill>
               </a14:hiddenFill>
             </a:ext>
             <a:ext uri="{91240B29-F687-4f45-9708-019B960494DF}">
-              <a14:hiddenLine xmlns:a14="http://schemas.microsoft.com/office/drawing/2010/main" w="9525">
+              <a14:hiddenLine xmlns:a14="http://schemas.microsoft.com/office/drawing/2010/main" xmlns="" w="9525">
                 <a:solidFill>
                   <a:srgbClr val="000000"/>
                 </a:solidFill>
@@ -13438,63 +12565,39 @@
             </a:r>
             <a:r>
               <a:rPr lang="ja-JP" altLang="en-US" sz="2800" b="0"/>
-              <a:t>変わる</a:t>
-            </a:r>
-            <a:r>
-              <a:rPr lang="ja-JP" altLang="en-US" sz="2800" b="0" smtClean="0"/>
-              <a:t>。前ページ</a:t>
-            </a:r>
-            <a:r>
-              <a:rPr lang="ja-JP" altLang="en-US" sz="2800" b="0" dirty="0" smtClean="0"/>
+              <a:t>変わる。前ページ</a:t>
+            </a:r>
+            <a:r>
+              <a:rPr lang="ja-JP" altLang="en-US" sz="2800" b="0" dirty="0"/>
               <a:t>の変数宣言の例</a:t>
             </a:r>
-            <a:endParaRPr lang="en-US" altLang="ja-JP" sz="2800" b="0" dirty="0" smtClean="0"/>
-          </a:p>
-          <a:p>
-            <a:r>
-              <a:rPr lang="da-DK" altLang="ja-JP" sz="2800" b="0" dirty="0" smtClean="0"/>
+            <a:endParaRPr lang="en-US" altLang="ja-JP" sz="2800" b="0" dirty="0"/>
+          </a:p>
+          <a:p>
+            <a:r>
+              <a:rPr lang="da-DK" altLang="ja-JP" sz="2800" b="0" dirty="0"/>
               <a:t>    </a:t>
             </a:r>
             <a:r>
-              <a:rPr lang="da-DK" altLang="ja-JP" sz="2800" b="0" dirty="0" err="1" smtClean="0"/>
+              <a:rPr lang="da-DK" altLang="ja-JP" sz="2800" b="0" dirty="0" err="1"/>
               <a:t>char</a:t>
             </a:r>
             <a:r>
-              <a:rPr lang="da-DK" altLang="ja-JP" sz="2800" b="0" dirty="0" smtClean="0"/>
-              <a:t> </a:t>
-            </a:r>
-            <a:r>
               <a:rPr lang="da-DK" altLang="ja-JP" sz="2800" b="0" dirty="0"/>
-              <a:t>( * ( * x ( ) ) </a:t>
-            </a:r>
-            <a:r>
-              <a:rPr lang="da-DK" altLang="ja-JP" sz="2800" b="0" dirty="0" smtClean="0"/>
-              <a:t>[3] </a:t>
-            </a:r>
-            <a:r>
-              <a:rPr lang="da-DK" altLang="ja-JP" sz="2800" b="0" dirty="0"/>
-              <a:t>) ( ) ; </a:t>
+              <a:t> ( * ( * x ( ) ) [3] ) ( ) ; </a:t>
             </a:r>
             <a:endParaRPr lang="en-US" altLang="ja-JP" sz="2800" b="0" dirty="0"/>
           </a:p>
           <a:p>
             <a:r>
-              <a:rPr lang="ja-JP" altLang="en-US" sz="2800" b="0" dirty="0" smtClean="0"/>
-              <a:t>で優先</a:t>
-            </a:r>
-            <a:r>
               <a:rPr lang="ja-JP" altLang="en-US" sz="2800" b="0" dirty="0"/>
-              <a:t>順位の</a:t>
-            </a:r>
-            <a:r>
-              <a:rPr lang="ja-JP" altLang="en-US" sz="2800" b="0" dirty="0" smtClean="0"/>
-              <a:t>括弧は</a:t>
-            </a:r>
-            <a:endParaRPr lang="en-US" altLang="ja-JP" sz="2800" b="0" dirty="0" smtClean="0"/>
-          </a:p>
-          <a:p>
-            <a:r>
-              <a:rPr lang="en-US" altLang="ja-JP" sz="2800" b="0" dirty="0" smtClean="0"/>
+              <a:t>で優先順位の括弧は</a:t>
+            </a:r>
+            <a:endParaRPr lang="en-US" altLang="ja-JP" sz="2800" b="0" dirty="0"/>
+          </a:p>
+          <a:p>
+            <a:r>
+              <a:rPr lang="en-US" altLang="ja-JP" sz="2800" b="0" dirty="0"/>
               <a:t>    char </a:t>
             </a:r>
             <a:r>
@@ -13531,11 +12634,7 @@
             </a:r>
             <a:r>
               <a:rPr lang="en-US" altLang="ja-JP" sz="2800" b="0" dirty="0"/>
-              <a:t> </a:t>
-            </a:r>
-            <a:r>
-              <a:rPr lang="en-US" altLang="ja-JP" sz="2800" b="0" dirty="0" smtClean="0"/>
-              <a:t>[3] </a:t>
+              <a:t> [3] </a:t>
             </a:r>
             <a:r>
               <a:rPr lang="en-US" altLang="ja-JP" sz="2800" dirty="0">
@@ -13554,18 +12653,14 @@
               <a:t> </a:t>
             </a:r>
             <a:r>
-              <a:rPr lang="en-US" altLang="ja-JP" sz="2800" b="0" dirty="0" smtClean="0"/>
+              <a:rPr lang="en-US" altLang="ja-JP" sz="2800" b="0" dirty="0"/>
               <a:t>;</a:t>
             </a:r>
           </a:p>
           <a:p>
             <a:r>
-              <a:rPr lang="ja-JP" altLang="en-US" sz="2800" b="0" dirty="0" smtClean="0"/>
-              <a:t>の太字の部分である。</a:t>
-            </a:r>
-            <a:r>
               <a:rPr lang="ja-JP" altLang="en-US" sz="2800" b="0" dirty="0"/>
-              <a:t>内側（宣言されている変数</a:t>
+              <a:t>の太字の部分である。内側（宣言されている変数</a:t>
             </a:r>
             <a:r>
               <a:rPr lang="en-US" altLang="ja-JP" sz="2800" b="0" dirty="0"/>
@@ -13573,49 +12668,20 @@
             </a:r>
             <a:r>
               <a:rPr lang="ja-JP" altLang="en-US" sz="2800" b="0" dirty="0"/>
-              <a:t>）から順番に優先順位に従って読むと</a:t>
-            </a:r>
-            <a:r>
-              <a:rPr lang="ja-JP" altLang="en-US" sz="2800" b="0" dirty="0" smtClean="0"/>
-              <a:t>、</a:t>
-            </a:r>
-            <a:endParaRPr lang="en-US" altLang="ja-JP" sz="2800" b="0" dirty="0" smtClean="0"/>
+              <a:t>）から順番に優先順位に従って読むと、</a:t>
+            </a:r>
+            <a:endParaRPr lang="en-US" altLang="ja-JP" sz="2800" b="0" dirty="0"/>
           </a:p>
           <a:p>
             <a:r>
               <a:rPr lang="en-US" altLang="ja-JP" sz="2800" b="0" dirty="0"/>
-              <a:t> </a:t>
-            </a:r>
-            <a:r>
-              <a:rPr lang="en-US" altLang="ja-JP" sz="2800" b="0" dirty="0" smtClean="0"/>
-              <a:t>    ( </a:t>
-            </a:r>
-            <a:r>
-              <a:rPr lang="en-US" altLang="ja-JP" sz="2800" b="0" dirty="0"/>
-              <a:t>)  *  </a:t>
-            </a:r>
-            <a:r>
-              <a:rPr lang="en-US" altLang="ja-JP" sz="2800" b="0" dirty="0" smtClean="0"/>
-              <a:t>[3]  </a:t>
-            </a:r>
-            <a:r>
-              <a:rPr lang="en-US" altLang="ja-JP" sz="2800" b="0" dirty="0"/>
-              <a:t>*  ( )  char </a:t>
-            </a:r>
-            <a:endParaRPr lang="en-US" altLang="ja-JP" sz="2800" b="0" dirty="0" smtClean="0"/>
-          </a:p>
-          <a:p>
-            <a:r>
-              <a:rPr lang="ja-JP" altLang="en-US" sz="2800" b="0" dirty="0" smtClean="0"/>
-              <a:t>と</a:t>
-            </a:r>
+              <a:t>     ( )  *  [3]  *  ( )  char </a:t>
+            </a:r>
+          </a:p>
+          <a:p>
             <a:r>
               <a:rPr lang="ja-JP" altLang="en-US" sz="2800" b="0" dirty="0"/>
-              <a:t>なる</a:t>
-            </a:r>
-            <a:r>
-              <a:rPr lang="ja-JP" altLang="en-US" sz="2800" b="0" dirty="0" smtClean="0"/>
-              <a:t>。</a:t>
+              <a:t>となる。</a:t>
             </a:r>
             <a:endParaRPr lang="en-US" altLang="ja-JP" sz="2800" b="0" dirty="0"/>
           </a:p>
@@ -13626,13 +12692,6 @@
   <p:clrMapOvr>
     <a:masterClrMapping/>
   </p:clrMapOvr>
-  <p:timing>
-    <p:tnLst>
-      <p:par>
-        <p:cTn xmlns:p14="http://schemas.microsoft.com/office/powerpoint/2010/main" id="1" dur="indefinite" restart="never" nodeType="tmRoot"/>
-      </p:par>
-    </p:tnLst>
-  </p:timing>
 </p:sld>
 </file>
 
@@ -13673,17 +12732,10 @@
                 <a:latin typeface="Arial" charset="0"/>
                 <a:ea typeface="ＭＳ Ｐゴシック" charset="0"/>
               </a:rPr>
-              <a:t>練習</a:t>
-            </a:r>
-            <a:r>
-              <a:rPr lang="ja-JP" altLang="en-US" dirty="0" smtClean="0">
-                <a:latin typeface="Arial" charset="0"/>
-                <a:ea typeface="ＭＳ Ｐゴシック" charset="0"/>
-              </a:rPr>
-              <a:t>問題</a:t>
-            </a:r>
-            <a:r>
-              <a:rPr lang="en-US" altLang="ja-JP" dirty="0" smtClean="0">
+              <a:t>練習問題</a:t>
+            </a:r>
+            <a:r>
+              <a:rPr lang="en-US" altLang="ja-JP" dirty="0">
                 <a:latin typeface="Arial" charset="0"/>
                 <a:ea typeface="ＭＳ Ｐゴシック" charset="0"/>
               </a:rPr>
@@ -13716,27 +12768,20 @@
               <a:buNone/>
             </a:pPr>
             <a:r>
-              <a:rPr lang="en-US" altLang="ja-JP" dirty="0" smtClean="0">
+              <a:rPr lang="en-US" altLang="ja-JP" dirty="0">
                 <a:latin typeface="Arial" charset="0"/>
                 <a:ea typeface="ＭＳ Ｐゴシック" charset="0"/>
               </a:rPr>
               <a:t>C</a:t>
             </a:r>
             <a:r>
-              <a:rPr lang="ja-JP" altLang="en-US" dirty="0" smtClean="0">
-                <a:latin typeface="Arial" charset="0"/>
-                <a:ea typeface="ＭＳ Ｐゴシック" charset="0"/>
-              </a:rPr>
-              <a:t>言語の変数</a:t>
-            </a:r>
-            <a:r>
               <a:rPr lang="ja-JP" altLang="en-US" dirty="0">
                 <a:latin typeface="Arial" charset="0"/>
                 <a:ea typeface="ＭＳ Ｐゴシック" charset="0"/>
               </a:rPr>
-              <a:t>宣言</a:t>
-            </a:r>
-            <a:endParaRPr lang="en-US" altLang="ja-JP" dirty="0" smtClean="0">
+              <a:t>言語の変数宣言</a:t>
+            </a:r>
+            <a:endParaRPr lang="en-US" altLang="ja-JP" dirty="0">
               <a:latin typeface="Arial" charset="0"/>
               <a:ea typeface="ＭＳ Ｐゴシック" charset="0"/>
             </a:endParaRPr>
@@ -13747,32 +12792,11 @@
               <a:buNone/>
             </a:pPr>
             <a:r>
-              <a:rPr lang="en-US" altLang="ja-JP" dirty="0" smtClean="0">
-                <a:latin typeface="Arial" charset="0"/>
-                <a:ea typeface="ＭＳ Ｐゴシック" charset="0"/>
-              </a:rPr>
-              <a:t>    char </a:t>
-            </a:r>
-            <a:r>
               <a:rPr lang="en-US" altLang="ja-JP" dirty="0">
                 <a:latin typeface="Arial" charset="0"/>
                 <a:ea typeface="ＭＳ Ｐゴシック" charset="0"/>
               </a:rPr>
-              <a:t>( * ( * y [3] ) ( ) ) </a:t>
-            </a:r>
-            <a:r>
-              <a:rPr lang="en-US" altLang="ja-JP" dirty="0" smtClean="0">
-                <a:latin typeface="Arial" charset="0"/>
-                <a:ea typeface="ＭＳ Ｐゴシック" charset="0"/>
-              </a:rPr>
-              <a:t>[5]  </a:t>
-            </a:r>
-            <a:r>
-              <a:rPr lang="en-US" altLang="ja-JP" dirty="0">
-                <a:latin typeface="Arial" charset="0"/>
-                <a:ea typeface="ＭＳ Ｐゴシック" charset="0"/>
-              </a:rPr>
-              <a:t>;</a:t>
+              <a:t>    char ( * ( * y [3] ) ( ) ) [5]  ;</a:t>
             </a:r>
           </a:p>
           <a:p>
@@ -13781,18 +12805,11 @@
               <a:buNone/>
             </a:pPr>
             <a:r>
-              <a:rPr lang="ja-JP" altLang="en-US" dirty="0" smtClean="0">
-                <a:latin typeface="Arial" charset="0"/>
-                <a:ea typeface="ＭＳ Ｐゴシック" charset="0"/>
-              </a:rPr>
-              <a:t>を</a:t>
-            </a:r>
-            <a:r>
               <a:rPr lang="ja-JP" altLang="en-US" dirty="0">
                 <a:latin typeface="Arial" charset="0"/>
                 <a:ea typeface="ＭＳ Ｐゴシック" charset="0"/>
               </a:rPr>
-              <a:t>型の後置記法による宣言に直せ。</a:t>
+              <a:t>を型の後置記法による宣言に直せ。</a:t>
             </a:r>
           </a:p>
         </p:txBody>
@@ -13802,13 +12819,6 @@
   <p:clrMapOvr>
     <a:masterClrMapping/>
   </p:clrMapOvr>
-  <p:timing>
-    <p:tnLst>
-      <p:par>
-        <p:cTn xmlns:p14="http://schemas.microsoft.com/office/powerpoint/2010/main" id="1" dur="indefinite" restart="never" nodeType="tmRoot"/>
-      </p:par>
-    </p:tnLst>
-  </p:timing>
 </p:sld>
 </file>
 
